--- a/it/slides/17-Architettura_dei_Calcolatori-Verm1_Parte_3-Codice.pptx
+++ b/it/slides/17-Architettura_dei_Calcolatori-Verm1_Parte_3-Codice.pptx
@@ -143,18 +143,26 @@
   <p:extLst>
     <p:ext uri="{521415D9-36F7-43E2-AB2F-B90AF26B5E84}">
       <p14:sectionLst xmlns:p14="http://schemas.microsoft.com/office/powerpoint/2010/main">
-        <p14:section name="Apertura" id="{33175ade-0706-cb89-a54d-36d863d7499f}">
+        <p14:section name="Apertura" id="{6391b89c-f890-0f40-84a1-d233f9858e88}">
           <p14:sldIdLst>
             <p14:sldId id="256"/>
             <p14:sldId id="257"/>
           </p14:sldIdLst>
         </p14:section>
-        <p14:section name="I listati" id="{4d45fe9c-7081-49e6-8f74-3dbaa301f339}">
+        <p14:section name="I listati" id="{44d579ab-9939-55ad-f41b-30757714d748}">
           <p14:sldIdLst>
             <p14:sldId id="258"/>
+          </p14:sldIdLst>
+        </p14:section>
+        <p14:section name="Passo 1: la memoria del gioco" id="{de90723a-07e4-00a5-7ffc-717f8d62006d}">
+          <p14:sldIdLst>
             <p14:sldId id="259"/>
             <p14:sldId id="260"/>
             <p14:sldId id="261"/>
+          </p14:sldIdLst>
+        </p14:section>
+        <p14:section name="Passo 2: tre stati" id="{064b8002-869c-ee6f-49b7-8827af713e83}">
+          <p14:sldIdLst>
             <p14:sldId id="262"/>
             <p14:sldId id="263"/>
             <p14:sldId id="264"/>
@@ -162,12 +170,20 @@
             <p14:sldId id="266"/>
             <p14:sldId id="267"/>
             <p14:sldId id="268"/>
+          </p14:sldIdLst>
+        </p14:section>
+        <p14:section name="Passo 3: un verme in memoria" id="{9c91151a-5986-b01c-e2c4-85c35fb48ad6}">
+          <p14:sldIdLst>
             <p14:sldId id="269"/>
             <p14:sldId id="270"/>
             <p14:sldId id="271"/>
             <p14:sldId id="272"/>
             <p14:sldId id="273"/>
             <p14:sldId id="274"/>
+          </p14:sldIdLst>
+        </p14:section>
+        <p14:section name="Passo 4: le regole" id="{9cdbd8d4-890e-ccc1-91aa-84c28dc1e348}">
+          <p14:sldIdLst>
             <p14:sldId id="275"/>
             <p14:sldId id="276"/>
             <p14:sldId id="277"/>
@@ -177,12 +193,16 @@
             <p14:sldId id="281"/>
             <p14:sldId id="282"/>
             <p14:sldId id="283"/>
+          </p14:sldIdLst>
+        </p14:section>
+        <p14:section name="Passo 5: guardare la memoria muoversi" id="{4d215e50-2b8e-6310-9c93-9d24d421427c}">
+          <p14:sldIdLst>
             <p14:sldId id="284"/>
             <p14:sldId id="285"/>
             <p14:sldId id="286"/>
           </p14:sldIdLst>
         </p14:section>
-        <p14:section name="Eseguire e provare" id="{731cc8d7-ae52-47f8-7f27-e37713e8d2bd}">
+        <p14:section name="Eseguire e provare" id="{551ef13e-04a5-e052-830c-4faf9d426500}">
           <p14:sldIdLst>
             <p14:sldId id="287"/>
             <p14:sldId id="288"/>
@@ -191,7 +211,7 @@
             <p14:sldId id="291"/>
           </p14:sldIdLst>
         </p14:section>
-        <p14:section name="Esercizi" id="{e3049f54-4847-be03-d194-bc19c419d34c}">
+        <p14:section name="Esercizi" id="{c28222e2-047a-4c36-d8e2-59d4d67c4354}">
           <p14:sldIdLst>
             <p14:sldId id="292"/>
           </p14:sldIdLst>
@@ -1489,7 +1509,7 @@
           <a:p>
             <a:r>
               <a:rPr lang="en-US" dirty="0"/>
-              <a:t>Eseguite e premete A: un verme di tre celle nella riga 12, con la testa più chiara a destra, e il cibo in una cella a caso. Ora guardate la memoria con il debugger. All'indirizzo di body_x i primi byte sono 03 04 05. Nella mappa, alla riga 12 per 40 più 3, ci sono tre byte a 01 in un mare di zeri. State guardando le due strutture della slide 7 e della slide 8, riempite.
+              <a:t>Eseguite e premete A: un verme di tre celle nella riga 12, con la testa più chiara a destra, e il cibo in una cella a caso. Ora guardate la memoria con il debugger. All'indirizzo di body_x i primi byte sono 03 04 05. Nella mappa, alla riga 12 per 40 più 3, ci sono tre byte a 01 in un mare di zeri. State guardando le due strutture della presentazione della lezione, l'anello e la mappa, riempite.
 Per il docente: Per trovare l'indirizzo di body_x: fermarsi all'inizio di draw_worm e avanzare finché la t0, body_x è stata eseguita; t0 lo contiene. grid sta 512 byte dopo body_x; la riga 12 comincia 480 byte dopo grid.</a:t>
             </a:r>
             <a:endParaRPr lang="en-US" dirty="0"/>
@@ -4815,7 +4835,63 @@
       </p:sp>
       <p:sp>
         <p:nvSpPr>
-          <p:cNvPr id="12" name="Shape 10"/>
+          <p:cNvPr id="12" name="Text 10"/>
+          <p:cNvSpPr txBox="1"/>
+          <p:nvPr/>
+        </p:nvSpPr>
+        <p:spPr>
+          <a:xfrm>
+            <a:off x="4693615" y="566928"/>
+            <a:ext cx="6949440" cy="640080"/>
+          </a:xfrm>
+          <a:prstGeom prst="rect">
+            <a:avLst/>
+          </a:prstGeom>
+          <a:noFill/>
+          <a:ln/>
+        </p:spPr>
+        <p:txBody>
+          <a:bodyPr wrap="square" lIns="0" tIns="0" rIns="0" bIns="0" rtlCol="0" anchor="t"/>
+          <a:lstStyle/>
+          <a:p>
+            <a:pPr algn="r" indent="0" marL="0">
+              <a:buNone/>
+            </a:pPr>
+            <a:r>
+              <a:rPr lang="en-US" sz="1300" dirty="0">
+                <a:solidFill>
+                  <a:srgbClr val="CFE3EA"/>
+                </a:solidFill>
+                <a:latin typeface="Calibri" pitchFamily="34" charset="0"/>
+                <a:ea typeface="Calibri" pitchFamily="34" charset="-122"/>
+                <a:cs typeface="Calibri" pitchFamily="34" charset="-120"/>
+              </a:rPr>
+              <a:t>Presentazione del codice. I concetti, le figure e le domande sono nella presentazione della lezione:</a:t>
+            </a:r>
+            <a:endParaRPr lang="en-US" sz="1300" dirty="0"/>
+          </a:p>
+          <a:p>
+            <a:pPr algn="r" indent="0" marL="0">
+              <a:buNone/>
+            </a:pPr>
+            <a:r>
+              <a:rPr lang="en-US" sz="1300" dirty="0">
+                <a:solidFill>
+                  <a:srgbClr val="CFE3EA"/>
+                </a:solidFill>
+                <a:latin typeface="Calibri" pitchFamily="34" charset="0"/>
+                <a:ea typeface="Calibri" pitchFamily="34" charset="-122"/>
+                <a:cs typeface="Calibri" pitchFamily="34" charset="-120"/>
+              </a:rPr>
+              <a:t>17-Architettura_dei_Calcolatori-Verm1_Parte_3.pptx</a:t>
+            </a:r>
+            <a:endParaRPr lang="en-US" sz="1300" dirty="0"/>
+          </a:p>
+        </p:txBody>
+      </p:sp>
+      <p:sp>
+        <p:nvSpPr>
+          <p:cNvPr id="13" name="Shape 11"/>
           <p:cNvSpPr/>
           <p:nvPr/>
         </p:nvSpPr>
@@ -4842,7 +4918,7 @@
       </p:sp>
       <p:pic>
         <p:nvPicPr>
-          <p:cNvPr id="13" name="Image 0" descr="/Users/raffaelemontella/devel/riscv-prg32/computer-architecture-with-prg32/tools/assets/verm1_p3_play.png">    </p:cNvPr>
+          <p:cNvPr id="14" name="Image 0" descr="/Users/raffaelemontella/devel/riscv-prg32/computer-architecture-with-prg32/tools/assets/verm1_p3_play.png">    </p:cNvPr>
           <p:cNvPicPr>
             <a:picLocks noChangeAspect="1"/>
           </p:cNvPicPr>

--- a/it/slides/17-Architettura_dei_Calcolatori-Verm1_Parte_3-Codice.pptx
+++ b/it/slides/17-Architettura_dei_Calcolatori-Verm1_Parte_3-Codice.pptx
@@ -143,25 +143,25 @@
   <p:extLst>
     <p:ext uri="{521415D9-36F7-43E2-AB2F-B90AF26B5E84}">
       <p14:sectionLst xmlns:p14="http://schemas.microsoft.com/office/powerpoint/2010/main">
-        <p14:section name="Apertura" id="{6391b89c-f890-0f40-84a1-d233f9858e88}">
+        <p14:section name="Apertura" id="{1dccb343-d94f-90e8-6d2e-5f2268664b7e}">
           <p14:sldIdLst>
             <p14:sldId id="256"/>
             <p14:sldId id="257"/>
           </p14:sldIdLst>
         </p14:section>
-        <p14:section name="I listati" id="{44d579ab-9939-55ad-f41b-30757714d748}">
+        <p14:section name="I listati" id="{1cd903a2-7722-3394-c3ef-c78d8cd5e835}">
           <p14:sldIdLst>
             <p14:sldId id="258"/>
           </p14:sldIdLst>
         </p14:section>
-        <p14:section name="Passo 1: la memoria del gioco" id="{de90723a-07e4-00a5-7ffc-717f8d62006d}">
+        <p14:section name="Passo 1: la memoria del gioco" id="{3c345c91-c2f8-0841-eaac-958e00e3b618}">
           <p14:sldIdLst>
             <p14:sldId id="259"/>
             <p14:sldId id="260"/>
             <p14:sldId id="261"/>
           </p14:sldIdLst>
         </p14:section>
-        <p14:section name="Passo 2: tre stati" id="{064b8002-869c-ee6f-49b7-8827af713e83}">
+        <p14:section name="Passo 2: tre stati" id="{61147961-89b6-9948-06dc-4b8cf7719ace}">
           <p14:sldIdLst>
             <p14:sldId id="262"/>
             <p14:sldId id="263"/>
@@ -172,7 +172,7 @@
             <p14:sldId id="268"/>
           </p14:sldIdLst>
         </p14:section>
-        <p14:section name="Passo 3: un verme in memoria" id="{9c91151a-5986-b01c-e2c4-85c35fb48ad6}">
+        <p14:section name="Passo 3: un verme in memoria" id="{34f3c044-ca4e-aa72-148e-85810c57df38}">
           <p14:sldIdLst>
             <p14:sldId id="269"/>
             <p14:sldId id="270"/>
@@ -182,7 +182,7 @@
             <p14:sldId id="274"/>
           </p14:sldIdLst>
         </p14:section>
-        <p14:section name="Passo 4: le regole" id="{9cdbd8d4-890e-ccc1-91aa-84c28dc1e348}">
+        <p14:section name="Passo 4: le regole" id="{2218eab7-2c6c-8470-a4a5-16318cc65a04}">
           <p14:sldIdLst>
             <p14:sldId id="275"/>
             <p14:sldId id="276"/>
@@ -195,14 +195,14 @@
             <p14:sldId id="283"/>
           </p14:sldIdLst>
         </p14:section>
-        <p14:section name="Passo 5: guardare la memoria muoversi" id="{4d215e50-2b8e-6310-9c93-9d24d421427c}">
+        <p14:section name="Passo 5: guardare la memoria muoversi" id="{0d35dba8-fb10-49b2-dd29-b3b3a564a41d}">
           <p14:sldIdLst>
             <p14:sldId id="284"/>
             <p14:sldId id="285"/>
             <p14:sldId id="286"/>
           </p14:sldIdLst>
         </p14:section>
-        <p14:section name="Eseguire e provare" id="{551ef13e-04a5-e052-830c-4faf9d426500}">
+        <p14:section name="Eseguire e provare" id="{1f1d1c5e-7ea6-7cbd-06a6-b78ae4bc22dd}">
           <p14:sldIdLst>
             <p14:sldId id="287"/>
             <p14:sldId id="288"/>
@@ -211,7 +211,7 @@
             <p14:sldId id="291"/>
           </p14:sldIdLst>
         </p14:section>
-        <p14:section name="Esercizi" id="{c28222e2-047a-4c36-d8e2-59d4d67c4354}">
+        <p14:section name="Esercizi" id="{39ccc54a-a09a-d26d-f995-88a727bd62d8}">
           <p14:sldIdLst>
             <p14:sldId id="292"/>
           </p14:sldIdLst>
@@ -620,7 +620,9 @@
           <a:p>
             <a:r>
               <a:rPr lang="en-US" dirty="0"/>
-              <a:t>Questa è la presentazione del codice della Lezione 17. La presentazione della lezione contiene i concetti; questa contiene tutto ciò che si scrive e si esegue: i listati con la loro spiegazione, il programma completo, che cosa mostra, e il modo di provarlo su ciascuno dei tre host.</a:t>
+              <a:t>Questa è la presentazione del codice della Lezione 17. La presentazione della lezione contiene i concetti; questa contiene tutto ciò che si scrive e si esegue: i listati con la loro spiegazione, il programma completo, che cosa mostra, e il modo di provarlo su ciascuno dei tre host.
+Stato di apprendimento: DA COMPRENDERE OGGI, alla fine di questa lezione lo spiegate, lo seguite passo passo e lo applicate da soli; DA UTILIZZARE OGGI, oggi seguite e usate la ricetta; come funziona dentro si spiega più avanti, o non fa parte del corso; DA COMPRENDERE PIÙ AVANTI, riconoscete il nome e lo scopo; lo spiega una lezione successiva. Una slide senza etichetta è contesto: una storia, un esempio, una domanda, un esercizio.
+Stato di apprendimento di questa lezione. DA COMPRENDERE OGGI: gli array in memoria; macchine a stati finiti; .text, .rodata, .data; latch e flip-flop; la virgola fissa. DA UTILIZZARE OGGI: la convenzione di chiamata (Lezione 18) e, usati senza essere studiati nel corso, gli strumenti di PRG32, il debugger di PRG32-QT. DA COMPRENDERE PIÙ AVANTI: niente. Una slide senza etichetta è contesto: una storia, un esempio, una domanda, un esercizio.</a:t>
             </a:r>
             <a:endParaRPr lang="en-US" dirty="0"/>
           </a:p>
@@ -709,6 +711,7 @@
             <a:r>
               <a:rPr lang="en-US" dirty="0"/>
               <a:t>verm1_draw mostra un'immagine diversa in ogni stato. La riga del titolo si disegna sempre. In TITLE compare solo l'invito PRESS A, centrato: 132 è la x che centra sette caratteri da 8 pixel. In PLAY e OVER la funzione disegna punteggio, verme e cibo. Notate che draw non modifica nulla: la sua uscita dipende solo dallo stato e dalla memoria, come in una macchina di Moore.
+DA COMPRENDERE OGGI: macchine a stati finiti.
 Per il docente: Sostituite verm1_draw. L'uscita dipende solo dallo stato e dalla memoria: draw non modifica nulla.</a:t>
             </a:r>
             <a:endParaRPr lang="en-US" dirty="0"/>
@@ -798,6 +801,7 @@
             <a:r>
               <a:rPr lang="en-US" dirty="0"/>
               <a:t>La fine di verm1_draw: nello stato OVER si scrivono due parole sopra la scena. Una piccola funzione di servizio, draw_text, riempie i due argomenti di colore, bianco su nero, e lascia passare i primi tre, così ogni chiamata per disegnare testo richiede due righe in meno. Funzioni di servizio come questa rendono un programma più corto e più facile da modificare.
+DA COMPRENDERE OGGI: macchine a stati finiti.
 Per il docente: La fine di verm1_draw, e una piccola funzione di servizio che toglie due righe da ogni chiamata di testo.</a:t>
             </a:r>
             <a:endParaRPr lang="en-US" dirty="0"/>
@@ -1065,6 +1069,7 @@
             <a:r>
               <a:rPr lang="en-US" dirty="0"/>
               <a:t>La prima metà della vera new_game. Un ciclo pone a zero i 960 byte della mappa, una sb alla volta. Poi si posa il verme: tre segmenti nelle colonne 3, 4 e 5 della riga 12. Ogni segmento è scritto due volte: colonna e riga nell'anello, e un 1 nella mappa. L'espressione grid+12*COLS è calcolata dall'assemblatore. Poiché ogni elemento è un byte, l'indice si somma all'indirizzo base senza alcuno scorrimento.
+DA COMPRENDERE OGGI: gli array in memoria.
 Per il docente: grid+12*COLS è calcolato dall'assemblatore: l'indirizzo del primo byte della riga 12. sb memorizza un byte; l'indice si somma all'indirizzo base, senza scorrimento perché ogni elemento è un byte.</a:t>
             </a:r>
             <a:endParaRPr lang="en-US" dirty="0"/>
@@ -1154,6 +1159,7 @@
             <a:r>
               <a:rPr lang="en-US" dirty="0"/>
               <a:t>La seconda metà imposta le variabili: head_i vale 2 e length vale 3, che insieme descrivono il verme appena posato; direzione, timer e punteggio partono da zero; si piazza il primo cibo. L'ultima istruzione memorizza PLAY nello stato. L'ordine è voluto: la transizione è completa solo quando tutto è pronto.
+DA COMPRENDERE OGGI: gli array in memoria.
 Per il docente: La seconda metà di new_game. La transizione da TITLE a PLAY è completa solo quando tutto è pronto: lo stato si memorizza per ultimo.</a:t>
             </a:r>
             <a:endParaRPr lang="en-US" dirty="0"/>
@@ -1243,6 +1249,7 @@
             <a:r>
               <a:rPr lang="en-US" dirty="0"/>
               <a:t>draw_worm percorre l'anello all'indietro a partire dalla testa: il segmento numero i è l'elemento head_i - i, mascherato con 255. Colonna e riga si caricano con lbu, che legge un byte come numero senza segno, e si passano a draw_cell. Il segmento 0, la testa, è disegnato in un verde più chiaro degli altri. Il ciclo finisce quando i raggiunge la lunghezza.
+DA COMPRENDERE OGGI: gli array in memoria.
 Per il docente: lbu e non lb: una colonna è un numero da 0 a 39, mai negativo. Con lb un byte da 200 in su diventerebbe negativo: Lezione 05. Qui funzionerebbero entrambe; lbu dice ciò che intendiamo.</a:t>
             </a:r>
             <a:endParaRPr lang="en-US" dirty="0"/>
@@ -1332,6 +1339,7 @@
             <a:r>
               <a:rPr lang="en-US" dirty="0"/>
               <a:t>draw_score è il ciclo che nella Parte 2 stava dentro verm1_draw, ora una funzione a sé: una piccola tacca per ogni punto. Usa s0 come contatore, quindi lo salva all'inizio e lo ripristina alla fine.
+DA UTILIZZARE OGGI: la convenzione di chiamata (si studia nella Lezione 18).
 Per il docente: Lo stesso ciclo che nella Parte 2 stava dentro verm1_draw.</a:t>
             </a:r>
             <a:endParaRPr lang="en-US" dirty="0"/>
@@ -1688,6 +1696,7 @@
             <a:r>
               <a:rPr lang="en-US" dirty="0"/>
               <a:t>play_update è la vostra verm1_update della Parte 2 con un nome nuovo: i quattro test dei pulsanti e la regola dell'inversione a U. Una differenza: i pulsanti arrivano come argomento in a0, quindi non c'è alcuna chiamata per leggerli.
+DA COMPRENDERE OGGI: la virgola fissa.
 Per il docente: Si prende il corpo della vecchia verm1_update: si toglie la chiamata a prg32_input_read e si rinomina la funzione.</a:t>
             </a:r>
             <a:endParaRPr lang="en-US" dirty="0"/>
@@ -1777,6 +1786,7 @@
             <a:r>
               <a:rPr lang="en-US" dirty="0"/>
               <a:t>La fine di play_update è esattamente il timer della Parte 2: si somma la velocità, e quando si è accumulata una cella intera si chiama step.
+DA COMPRENDERE OGGI: la virgola fissa.
 Per il docente: La fine di play_update.</a:t>
             </a:r>
             <a:endParaRPr lang="en-US" dirty="0"/>
@@ -1866,6 +1876,7 @@
             <a:r>
               <a:rPr lang="en-US" dirty="0"/>
               <a:t>L'inizio di step. Tre registri devono conservare il valore attraverso le chiamate che seguono: s0 e s1 per la cella della nuova testa, s2 per il risultato del test del cibo. Il frame salva quindi ra e tre registri s. La ricerca di dx e dy è quella della Parte 2.
+DA UTILIZZARE OGGI: la convenzione di chiamata (si studia nella Lezione 18).
 Per il docente: Il frame ha posto per quattro parole: ra e tre registri salvati.</a:t>
             </a:r>
             <a:endParaRPr lang="en-US" dirty="0"/>
@@ -1955,6 +1966,7 @@
             <a:r>
               <a:rPr lang="en-US" dirty="0"/>
               <a:t>Dove sarà la testa? La testa attuale è l'elemento head_i dell'anello: colonna e riga si caricano con lbu, si sommano dx e dy, e il risultato rientra ai bordi come nella Parte 2. La nuova cella ora sta in s0 e s1. Non è stato scritto nulla: prima il programma deve guardare.
+DA COMPRENDERE OGGI: gli array in memoria.
 Per il docente: La nuova cella è soltanto calcolata, in s0 e s1. La scrittura viene dopo il test di collisione.</a:t>
             </a:r>
             <a:endParaRPr lang="en-US" dirty="0"/>
@@ -2044,6 +2056,7 @@
             <a:r>
               <a:rPr lang="en-US" dirty="0"/>
               <a:t>Mangiare, o muovere la coda. Il comparatore della Parte 2 lascia il risultato in s2: zero se la nuova testa è sul cibo. Se il verme mangia, la lunghezza cresce di uno e la coda resta dov'è. Se no, la coda deve andarsene: il suo elemento è head_i - length + 1, e se ne caricano colonna e riga. Crescere e non muovere la coda sono la stessa cosa: è tutto qui il trucco di Snake.
+DA COMPRENDERE OGGI: gli array in memoria.
 Per il docente: Crescere e non muovere la coda sono la stessa cosa: è tutto qui il trucco di Snake. t3 e t4 ricevono colonna e riga della coda.</a:t>
             </a:r>
             <a:endParaRPr lang="en-US" dirty="0"/>
@@ -2133,6 +2146,7 @@
             <a:r>
               <a:rPr lang="en-US" dirty="0"/>
               <a:t>Ora la mappa. Il numero di un byte è riga per 40 più colonna, calcolato con mul e add. Prima si azzera il byte della coda; poi si esamina il byte della nuova testa. L'ordine conta: nello stesso passo la coda si sposta, quindi la testa può entrare nella cella che la coda ha appena lasciato. Se il byte vale 1 il verme si è morso: lo stato diventa OVER e il punteggio migliore viene aggiornato.
+DA COMPRENDERE OGGI: gli array in memoria.
 Per il docente: L'ordine conta: liberare la coda prima del test permette al verme di inseguire la propria coda, come nel gioco originale. mul richiede l'estensione M di RISC-V, che l'ESP32-C6 ha.</a:t>
             </a:r>
             <a:endParaRPr lang="en-US" dirty="0"/>
@@ -2222,6 +2236,7 @@
             <a:r>
               <a:rPr lang="en-US" dirty="0"/>
               <a:t>Se la cella è libera, si scrive la nuova testa: un 1 nella mappa, head_i più 1 mascherato con 255, e colonna e riga nel nuovo elemento dell'anello. Poi, se s2 vale zero, la ricompensa: un punto, nuovo cibo, un suono. Dopo una collisione la funzione salta tutto questo, così lo schermo mostra il verme com'era prima del passo fatale.
+DA COMPRENDERE OGGI: gli array in memoria.
 Per il docente: La fine di step. Dopo una collisione la funzione salta direttamente all'etichetta 9: non si scrive nulla, e lo schermo mostra il verme com'era prima del passo fatale.</a:t>
             </a:r>
             <a:endParaRPr lang="en-US" dirty="0"/>
@@ -2311,6 +2326,7 @@
             <a:r>
               <a:rPr lang="en-US" dirty="0"/>
               <a:t>place_food viene corretta: estrae una cella a caso, guarda il suo byte nella mappa, e se la cella è occupata estrae di nuovo, finché non ne esce una libera. La colonna aspetta in s0 mentre si chiede il secondo numero casuale. Il ciclo è breve: anche con il verme più lungo servono in media meno di due tentativi.
+DA UTILIZZARE OGGI: la convenzione di chiamata (si studia nella Lezione 18).
 Per il docente: Sostituite place_food della Parte 2. Il ciclo finisce presto finché il verme è corto: con 255 celle su 960 la media è meno di due tentativi.</a:t>
             </a:r>
             <a:endParaRPr lang="en-US" dirty="0"/>
@@ -2578,6 +2594,7 @@
             <a:r>
               <a:rPr lang="en-US" dirty="0"/>
               <a:t>I soliti due comandi. Oggi il file cambia moltissimo, quindi non aspettate la fine per compilare: compilate ed eseguite dopo ogni slide intitolata «Eseguite». Se qualcosa si rompe, l'errore sta nelle righe aggiunte dopo l'ultima esecuzione.
+DA UTILIZZARE OGGI: gli strumenti di PRG32 (si usa, non si studia, in questo corso).
 Per il docente: Gli stessi due comandi. Oggi il file cambia molto: compilare dopo ogni slide che dice Eseguite, non solo alla fine.</a:t>
             </a:r>
             <a:endParaRPr lang="en-US" dirty="0"/>
@@ -2932,6 +2949,7 @@
             <a:r>
               <a:rPr lang="en-US" dirty="0"/>
               <a:t>La via più rapida: PRG32-QT sul vostro computer. Quattro passi, ciascuno con il suo comando. PRG32-QT si comporta come una scheda sulla porta 8080, ed è per questo che il comando di caricamento dice esp32c6. Con la modalità debug abilitata potete fermarvi su qualsiasi istruzione e leggere registri e memoria.
+DA UTILIZZARE OGGI: gli strumenti di PRG32 (si usa, non si studia, in questo corso).
 Per il docente: Eseguito dai test: la cartuccia di questa slide è compilata con questo comando ed eseguita sull'esecutore senza interfaccia di PRG32-QT. Senza la toolchain: importate il file .prg32 in PRG32-QT e scegliete Run Cartridge. Tasti: frecce o WASD per il joystick, Z o J per A, X o K per B, Invio per Start, Esc per tornare a Setup.</a:t>
             </a:r>
             <a:endParaRPr lang="en-US" dirty="0"/>
@@ -3021,6 +3039,7 @@
             <a:r>
               <a:rPr lang="en-US" dirty="0"/>
               <a:t>Lo stesso programma sull'emulatore. QEMU esegue il firmware vero su un chip emulato, quindi la cartuccia va compilata per l'architettura qemu. Caricate la cartuccia mentre QEMU è chiuso. Il firmware si apre sul menu Setup: scegliete Run Cartridge e lo slot. Ricordate che la tastiera è letta dal terminale, non dalla finestra con l'immagine.
+DA UTILIZZARE OGGI: gli strumenti di PRG32 (si usa, non si studia, in questo corso).
 Per il docente: Verificato dai test fino al caricamento: la cartuccia è compilata per l'architettura qemu e accettata nell'immagine flash dell'emulatore. Ciò che l'emulatore poi mostra non è verificato automaticamente: il QEMU di Espressif ha bisogno della sua finestra. Dall'ottobre 2026 il firmware parte da Setup: scegliete Run Cartridge, poi cart0.</a:t>
             </a:r>
             <a:endParaRPr lang="en-US" dirty="0"/>
@@ -3110,6 +3129,7 @@
             <a:r>
               <a:rPr lang="en-US" dirty="0"/>
               <a:t>Lo stesso programma sul kit. Il firmware si scrive una volta, via USB; dopo, le cartucce viaggiano sul Wi-Fi. Il comando di caricamento è quello usato per PRG32-QT con l'indirizzo della scheda. È l'unico host che i test automatici non eseguono: provatelo, e riferite ciò che vedete.
+DA UTILIZZARE OGGI: gli strumenti di PRG32 (si usa, non si studia, in questo corso).
 Per il docente: Non eseguito dai test: sulla macchina di prova non c'è una scheda. La cartuccia per l'architettura esp32c6 è compilata dai test; i passi sono quelli della documentazione di PRG32. Se la porta seriale non viene trovata, passatela esplicitamente. Per usare il Wi-Fi dell'aula: python3 -m prg32 wifi set --ssid NOME --password PASSWORD --mode sta.</a:t>
             </a:r>
             <a:endParaRPr lang="en-US" dirty="0"/>
@@ -3199,6 +3219,7 @@
             <a:r>
               <a:rPr lang="en-US" dirty="0"/>
               <a:t>I cinque sintomi più comuni, che cosa significa ciascuno, e che cosa fare. Leggete il messaggio prima di cambiare qualcosa: quasi sempre nomina la causa.
+DA UTILIZZARE OGGI: gli strumenti di PRG32 (si usa, non si studia, in questo corso).
 Per il docente: Le prime tre righe coprono la maggior parte dei casi. Quando chiedete aiuto, incollate il comando e l'intero messaggio come testo. docs/usage/troubleshooting.md del repository di PRG32 ha l'elenco completo.</a:t>
             </a:r>
             <a:endParaRPr lang="en-US" dirty="0"/>
@@ -3377,6 +3398,7 @@
             <a:r>
               <a:rPr lang="en-US" dirty="0"/>
               <a:t>Le nuove costanti sostituiscono quelle della Parte 2. BODY è un verde più scuro per i segmenti dietro la testa. BTN_A è la maschera del pulsante A, il bit 4 della parola dei pulsanti. I tre stati sono semplicemente i numeri 0, 1 e 2, con un nome. Le righe .section e .global, che chiudevano questo blocco, passano alla slide successiva.
+DA COMPRENDERE OGGI: macchine a stati finiti.
 Per il docente: Sostituite le costanti della Parte 2.</a:t>
             </a:r>
             <a:endParaRPr lang="en-US" dirty="0"/>
@@ -3466,6 +3488,7 @@
             <a:r>
               <a:rPr lang="en-US" dirty="0"/>
               <a:t>La sezione di sola lettura: tre stringhe, per il titolo, l'invito e il game over, e le due tabelle dx e dy della Parte 2. Il programma qui non scrive mai. Sulla scheda questa sezione potrebbe restare nella flash; è la parte della cartuccia che sopravvivrebbe a uno spegnimento.
+DA COMPRENDERE OGGI: .text, .rodata, .data.
 Per il docente: Sostituite la .rodata della Parte 2.</a:t>
             </a:r>
             <a:endParaRPr lang="en-US" dirty="0"/>
@@ -3555,6 +3578,7 @@
             <a:r>
               <a:rPr lang="en-US" dirty="0"/>
               <a:t>La sezione delle variabili. head_x e head_y sono sparite: la testa ora vive nell'anello. La direttiva .space riserva un certo numero di byte senza dare un nome a ciascuno: 256 per body_x, 256 per body_y, 960 per la mappa. best contiene il punteggio migliore: sopravvive da una partita alla successiva, ma non a uno spegnimento, perché vive in RAM. Una cartuccia portabile non ha una memoria permanente propria: un limite onesto.
+DA COMPRENDERE OGGI: .text, .rodata, .data.
 Per il docente: Sostituite la .data della Parte 2. Tutto ciò che sta qui si perde quando la cartuccia viene scaricata: Lezione 16. Un punteggio migliore che sopravviva richiede memoria permanente, che una cartuccia portabile non ha: un limite onesto.</a:t>
             </a:r>
             <a:endParaRPr lang="en-US" dirty="0"/>
@@ -3644,6 +3668,7 @@
             <a:r>
               <a:rPr lang="en-US" dirty="0"/>
               <a:t>verm1_init ora fa una cosa sola: sceglie il primo stato, TITLE. Preparare la partita è compito di una funzione nuova, new_game, chiamata quando il giocatore preme A. Cancellate dal vostro file le vecchie verm1_update, step e verm1_draw: le prossime slide le sostituiscono. Tenete place_food, eat_sound e draw_cell.
+DA COMPRENDERE OGGI: macchine a stati finiti.
 Per il docente: Sostituite verm1_init. Cancellate dal vostro file verm1_update, step e verm1_draw della Parte 2: le prossime slide le sostituiscono. Tenete place_food, eat_sound e draw_cell.</a:t>
             </a:r>
             <a:endParaRPr lang="en-US" dirty="0"/>
@@ -3733,6 +3758,7 @@
             <a:r>
               <a:rPr lang="en-US" dirty="0"/>
               <a:t>La prima metà della nuova verm1_update legge i pulsanti e ne calcola i fronti. s0 contiene i pulsanti di questo frame; prev_btn, in memoria, quelli del frame precedente. L'espressione «adesso AND NOT prima» dà un 1 solo nelle posizioni in cui una pressione è appena cominciata, e il risultato va in s1. Poi si aggiorna prev_btn. È il rilevatore di fronte della Lezione 13: un registro che ritarda di un clock, e una porta AND con un ingresso invertito.
+DA COMPRENDERE OGGI: latch e flip-flop. DA UTILIZZARE OGGI: la convenzione di chiamata (si studia nella Lezione 18).
 Per il docente: Il rilevatore di fronte della Lezione 13: un flip-flop e una porta AND con un ingresso invertito. Qui il flip-flop è una parola di memoria e il clock è il frame.</a:t>
             </a:r>
             <a:endParaRPr lang="en-US" dirty="0"/>
@@ -3822,6 +3848,7 @@
             <a:r>
               <a:rPr lang="en-US" dirty="0"/>
               <a:t>La seconda metà è la tabella delle transizioni, riga per riga. Lo stato si legge per primo, e decide chi guarda gli ingressi. In TITLE una nuova pressione di A chiama new_game. In OVER una nuova pressione di A memorizza TITLE. In PLAY si passano a play_update i pulsanti tenuti premuti, i livelli e non i fronti, perché la guida deve funzionare mentre un pulsante resta giù. Qui le etichette hanno un nome, u_play, u_start, u_done, perché con i numeri sarebbe difficile orientarsi.
+DA COMPRENDERE OGGI: macchine a stati finiti.
 Per il docente: È il resto di verm1_update: la tabella delle transizioni, riga per riga. Da OVER a TITLE si memorizza soltanto il nuovo stato; da TITLE a PLAY si chiama new_game, che memorizza PLAY da sé.</a:t>
             </a:r>
             <a:endParaRPr lang="en-US" dirty="0"/>
@@ -4942,6 +4969,420 @@
       </p:pic>
       <p:sp>
         <p:nvSpPr>
+          <p:cNvPr id="15" name="Shape 12"/>
+          <p:cNvSpPr/>
+          <p:nvPr/>
+        </p:nvSpPr>
+        <p:spPr>
+          <a:xfrm>
+            <a:off x="8910777" y="91440"/>
+            <a:ext cx="2732278" cy="274320"/>
+          </a:xfrm>
+          <a:prstGeom prst="rect">
+            <a:avLst/>
+          </a:prstGeom>
+          <a:solidFill>
+            <a:srgbClr val="F3E8FF"/>
+          </a:solidFill>
+          <a:ln w="12700">
+            <a:solidFill>
+              <a:srgbClr val="7E22CE"/>
+            </a:solidFill>
+            <a:prstDash val="dash"/>
+          </a:ln>
+        </p:spPr>
+      </p:sp>
+      <p:sp>
+        <p:nvSpPr>
+          <p:cNvPr id="16" name="Shape 13"/>
+          <p:cNvSpPr/>
+          <p:nvPr/>
+        </p:nvSpPr>
+        <p:spPr>
+          <a:xfrm>
+            <a:off x="8938209" y="128016"/>
+            <a:ext cx="45720" cy="45720"/>
+          </a:xfrm>
+          <a:prstGeom prst="rect">
+            <a:avLst/>
+          </a:prstGeom>
+          <a:solidFill>
+            <a:srgbClr val="7E22CE"/>
+          </a:solidFill>
+          <a:ln w="12700">
+            <a:solidFill>
+              <a:srgbClr val="7E22CE"/>
+            </a:solidFill>
+            <a:prstDash val="solid"/>
+          </a:ln>
+        </p:spPr>
+      </p:sp>
+      <p:sp>
+        <p:nvSpPr>
+          <p:cNvPr id="17" name="Shape 14"/>
+          <p:cNvSpPr/>
+          <p:nvPr/>
+        </p:nvSpPr>
+        <p:spPr>
+          <a:xfrm>
+            <a:off x="8938209" y="205740"/>
+            <a:ext cx="45720" cy="45720"/>
+          </a:xfrm>
+          <a:prstGeom prst="rect">
+            <a:avLst/>
+          </a:prstGeom>
+          <a:solidFill>
+            <a:srgbClr val="7E22CE"/>
+          </a:solidFill>
+          <a:ln w="12700">
+            <a:solidFill>
+              <a:srgbClr val="7E22CE"/>
+            </a:solidFill>
+            <a:prstDash val="solid"/>
+          </a:ln>
+        </p:spPr>
+      </p:sp>
+      <p:sp>
+        <p:nvSpPr>
+          <p:cNvPr id="18" name="Shape 15"/>
+          <p:cNvSpPr/>
+          <p:nvPr/>
+        </p:nvSpPr>
+        <p:spPr>
+          <a:xfrm>
+            <a:off x="8938209" y="283464"/>
+            <a:ext cx="45720" cy="45720"/>
+          </a:xfrm>
+          <a:prstGeom prst="rect">
+            <a:avLst/>
+          </a:prstGeom>
+          <a:solidFill>
+            <a:srgbClr val="7E22CE"/>
+          </a:solidFill>
+          <a:ln w="12700">
+            <a:solidFill>
+              <a:srgbClr val="7E22CE"/>
+            </a:solidFill>
+            <a:prstDash val="solid"/>
+          </a:ln>
+        </p:spPr>
+      </p:sp>
+      <p:pic>
+        <p:nvPicPr>
+          <p:cNvPr id="19" name="Image 1" descr="preencoded.png">    </p:cNvPr>
+          <p:cNvPicPr>
+            <a:picLocks noChangeAspect="1"/>
+          </p:cNvPicPr>
+          <p:nvPr/>
+        </p:nvPicPr>
+        <p:blipFill>
+          <a:blip r:embed="rId2"/>
+          <a:stretch>
+            <a:fillRect/>
+          </a:stretch>
+        </p:blipFill>
+        <p:spPr>
+          <a:xfrm>
+            <a:off x="9038793" y="128016"/>
+            <a:ext cx="201168" cy="201168"/>
+          </a:xfrm>
+          <a:prstGeom prst="rect">
+            <a:avLst/>
+          </a:prstGeom>
+        </p:spPr>
+      </p:pic>
+      <p:sp>
+        <p:nvSpPr>
+          <p:cNvPr id="20" name="Text 16"/>
+          <p:cNvSpPr txBox="1"/>
+          <p:nvPr/>
+        </p:nvSpPr>
+        <p:spPr>
+          <a:xfrm>
+            <a:off x="9294825" y="91440"/>
+            <a:ext cx="2311654" cy="274320"/>
+          </a:xfrm>
+          <a:prstGeom prst="rect">
+            <a:avLst/>
+          </a:prstGeom>
+          <a:noFill/>
+          <a:ln/>
+        </p:spPr>
+        <p:txBody>
+          <a:bodyPr wrap="square" lIns="0" tIns="0" rIns="0" bIns="0" rtlCol="0" anchor="ctr"/>
+          <a:lstStyle/>
+          <a:p>
+            <a:pPr indent="0" marL="0">
+              <a:buNone/>
+            </a:pPr>
+            <a:r>
+              <a:rPr lang="en-US" sz="1100" b="1" dirty="0">
+                <a:solidFill>
+                  <a:srgbClr val="6B21A8"/>
+                </a:solidFill>
+                <a:latin typeface="Calibri" pitchFamily="34" charset="0"/>
+                <a:ea typeface="Calibri" pitchFamily="34" charset="-122"/>
+                <a:cs typeface="Calibri" pitchFamily="34" charset="-120"/>
+              </a:rPr>
+              <a:t>DA COMPRENDERE PIÙ AVANTI</a:t>
+            </a:r>
+            <a:endParaRPr lang="en-US" sz="1100" dirty="0"/>
+          </a:p>
+        </p:txBody>
+      </p:sp>
+      <p:sp>
+        <p:nvSpPr>
+          <p:cNvPr id="21" name="Shape 17"/>
+          <p:cNvSpPr/>
+          <p:nvPr/>
+        </p:nvSpPr>
+        <p:spPr>
+          <a:xfrm>
+            <a:off x="6675069" y="91440"/>
+            <a:ext cx="2125980" cy="274320"/>
+          </a:xfrm>
+          <a:prstGeom prst="rect">
+            <a:avLst/>
+          </a:prstGeom>
+          <a:solidFill>
+            <a:srgbClr val="FEF3C7"/>
+          </a:solidFill>
+          <a:ln w="12700">
+            <a:solidFill>
+              <a:srgbClr val="B45309"/>
+            </a:solidFill>
+            <a:prstDash val="solid"/>
+          </a:ln>
+        </p:spPr>
+      </p:sp>
+      <p:sp>
+        <p:nvSpPr>
+          <p:cNvPr id="22" name="Shape 18"/>
+          <p:cNvSpPr/>
+          <p:nvPr/>
+        </p:nvSpPr>
+        <p:spPr>
+          <a:xfrm>
+            <a:off x="6675069" y="91440"/>
+            <a:ext cx="27432" cy="274320"/>
+          </a:xfrm>
+          <a:prstGeom prst="rect">
+            <a:avLst/>
+          </a:prstGeom>
+          <a:solidFill>
+            <a:srgbClr val="B45309"/>
+          </a:solidFill>
+          <a:ln w="12700">
+            <a:solidFill>
+              <a:srgbClr val="B45309"/>
+            </a:solidFill>
+            <a:prstDash val="solid"/>
+          </a:ln>
+        </p:spPr>
+      </p:sp>
+      <p:sp>
+        <p:nvSpPr>
+          <p:cNvPr id="23" name="Shape 19"/>
+          <p:cNvSpPr/>
+          <p:nvPr/>
+        </p:nvSpPr>
+        <p:spPr>
+          <a:xfrm>
+            <a:off x="6729933" y="91440"/>
+            <a:ext cx="27432" cy="274320"/>
+          </a:xfrm>
+          <a:prstGeom prst="rect">
+            <a:avLst/>
+          </a:prstGeom>
+          <a:solidFill>
+            <a:srgbClr val="B45309"/>
+          </a:solidFill>
+          <a:ln w="12700">
+            <a:solidFill>
+              <a:srgbClr val="B45309"/>
+            </a:solidFill>
+            <a:prstDash val="solid"/>
+          </a:ln>
+        </p:spPr>
+      </p:sp>
+      <p:pic>
+        <p:nvPicPr>
+          <p:cNvPr id="24" name="Image 2" descr="preencoded.png">    </p:cNvPr>
+          <p:cNvPicPr>
+            <a:picLocks noChangeAspect="1"/>
+          </p:cNvPicPr>
+          <p:nvPr/>
+        </p:nvPicPr>
+        <p:blipFill>
+          <a:blip r:embed="rId3"/>
+          <a:stretch>
+            <a:fillRect/>
+          </a:stretch>
+        </p:blipFill>
+        <p:spPr>
+          <a:xfrm>
+            <a:off x="6803085" y="128016"/>
+            <a:ext cx="201168" cy="201168"/>
+          </a:xfrm>
+          <a:prstGeom prst="rect">
+            <a:avLst/>
+          </a:prstGeom>
+        </p:spPr>
+      </p:pic>
+      <p:sp>
+        <p:nvSpPr>
+          <p:cNvPr id="25" name="Text 20"/>
+          <p:cNvSpPr txBox="1"/>
+          <p:nvPr/>
+        </p:nvSpPr>
+        <p:spPr>
+          <a:xfrm>
+            <a:off x="7059117" y="91440"/>
+            <a:ext cx="1705356" cy="274320"/>
+          </a:xfrm>
+          <a:prstGeom prst="rect">
+            <a:avLst/>
+          </a:prstGeom>
+          <a:noFill/>
+          <a:ln/>
+        </p:spPr>
+        <p:txBody>
+          <a:bodyPr wrap="square" lIns="0" tIns="0" rIns="0" bIns="0" rtlCol="0" anchor="ctr"/>
+          <a:lstStyle/>
+          <a:p>
+            <a:pPr indent="0" marL="0">
+              <a:buNone/>
+            </a:pPr>
+            <a:r>
+              <a:rPr lang="en-US" sz="1100" b="1" dirty="0">
+                <a:solidFill>
+                  <a:srgbClr val="92400E"/>
+                </a:solidFill>
+                <a:latin typeface="Calibri" pitchFamily="34" charset="0"/>
+                <a:ea typeface="Calibri" pitchFamily="34" charset="-122"/>
+                <a:cs typeface="Calibri" pitchFamily="34" charset="-120"/>
+              </a:rPr>
+              <a:t>DA UTILIZZARE OGGI</a:t>
+            </a:r>
+            <a:endParaRPr lang="en-US" sz="1100" dirty="0"/>
+          </a:p>
+        </p:txBody>
+      </p:sp>
+      <p:sp>
+        <p:nvSpPr>
+          <p:cNvPr id="26" name="Shape 21"/>
+          <p:cNvSpPr/>
+          <p:nvPr/>
+        </p:nvSpPr>
+        <p:spPr>
+          <a:xfrm>
+            <a:off x="4352747" y="91440"/>
+            <a:ext cx="2212594" cy="274320"/>
+          </a:xfrm>
+          <a:prstGeom prst="rect">
+            <a:avLst/>
+          </a:prstGeom>
+          <a:solidFill>
+            <a:srgbClr val="E0F2FE"/>
+          </a:solidFill>
+          <a:ln w="12700">
+            <a:solidFill>
+              <a:srgbClr val="0369A1"/>
+            </a:solidFill>
+            <a:prstDash val="solid"/>
+          </a:ln>
+        </p:spPr>
+      </p:sp>
+      <p:sp>
+        <p:nvSpPr>
+          <p:cNvPr id="27" name="Shape 22"/>
+          <p:cNvSpPr/>
+          <p:nvPr/>
+        </p:nvSpPr>
+        <p:spPr>
+          <a:xfrm>
+            <a:off x="4352747" y="91440"/>
+            <a:ext cx="73152" cy="274320"/>
+          </a:xfrm>
+          <a:prstGeom prst="rect">
+            <a:avLst/>
+          </a:prstGeom>
+          <a:solidFill>
+            <a:srgbClr val="0369A1"/>
+          </a:solidFill>
+          <a:ln w="12700">
+            <a:solidFill>
+              <a:srgbClr val="0369A1"/>
+            </a:solidFill>
+            <a:prstDash val="solid"/>
+          </a:ln>
+        </p:spPr>
+      </p:sp>
+      <p:pic>
+        <p:nvPicPr>
+          <p:cNvPr id="28" name="Image 3" descr="preencoded.png">    </p:cNvPr>
+          <p:cNvPicPr>
+            <a:picLocks noChangeAspect="1"/>
+          </p:cNvPicPr>
+          <p:nvPr/>
+        </p:nvPicPr>
+        <p:blipFill>
+          <a:blip r:embed="rId4"/>
+          <a:stretch>
+            <a:fillRect/>
+          </a:stretch>
+        </p:blipFill>
+        <p:spPr>
+          <a:xfrm>
+            <a:off x="4480763" y="128016"/>
+            <a:ext cx="201168" cy="201168"/>
+          </a:xfrm>
+          <a:prstGeom prst="rect">
+            <a:avLst/>
+          </a:prstGeom>
+        </p:spPr>
+      </p:pic>
+      <p:sp>
+        <p:nvSpPr>
+          <p:cNvPr id="29" name="Text 23"/>
+          <p:cNvSpPr txBox="1"/>
+          <p:nvPr/>
+        </p:nvSpPr>
+        <p:spPr>
+          <a:xfrm>
+            <a:off x="4736795" y="91440"/>
+            <a:ext cx="1791970" cy="274320"/>
+          </a:xfrm>
+          <a:prstGeom prst="rect">
+            <a:avLst/>
+          </a:prstGeom>
+          <a:noFill/>
+          <a:ln/>
+        </p:spPr>
+        <p:txBody>
+          <a:bodyPr wrap="square" lIns="0" tIns="0" rIns="0" bIns="0" rtlCol="0" anchor="ctr"/>
+          <a:lstStyle/>
+          <a:p>
+            <a:pPr indent="0" marL="0">
+              <a:buNone/>
+            </a:pPr>
+            <a:r>
+              <a:rPr lang="en-US" sz="1100" b="1" dirty="0">
+                <a:solidFill>
+                  <a:srgbClr val="075985"/>
+                </a:solidFill>
+                <a:latin typeface="Calibri" pitchFamily="34" charset="0"/>
+                <a:ea typeface="Calibri" pitchFamily="34" charset="-122"/>
+                <a:cs typeface="Calibri" pitchFamily="34" charset="-120"/>
+              </a:rPr>
+              <a:t>DA COMPRENDERE OGGI</a:t>
+            </a:r>
+            <a:endParaRPr lang="en-US" sz="1100" dirty="0"/>
+          </a:p>
+        </p:txBody>
+      </p:sp>
+      <p:sp>
+        <p:nvSpPr>
           <p:cNvPr id="25" name="Slide Number Placeholder 0"/>
           <p:cNvSpPr>
             <a:spLocks noGrp="1"/>
@@ -6027,6 +6468,133 @@
       </p:sp>
       <p:sp>
         <p:nvSpPr>
+          <p:cNvPr id="17" name="Shape 15"/>
+          <p:cNvSpPr/>
+          <p:nvPr/>
+        </p:nvSpPr>
+        <p:spPr>
+          <a:xfrm>
+            <a:off x="7723327" y="91440"/>
+            <a:ext cx="3919728" cy="274320"/>
+          </a:xfrm>
+          <a:prstGeom prst="rect">
+            <a:avLst/>
+          </a:prstGeom>
+          <a:solidFill>
+            <a:srgbClr val="E0F2FE"/>
+          </a:solidFill>
+          <a:ln w="12700">
+            <a:solidFill>
+              <a:srgbClr val="0369A1"/>
+            </a:solidFill>
+            <a:prstDash val="solid"/>
+          </a:ln>
+        </p:spPr>
+      </p:sp>
+      <p:sp>
+        <p:nvSpPr>
+          <p:cNvPr id="18" name="Shape 16"/>
+          <p:cNvSpPr/>
+          <p:nvPr/>
+        </p:nvSpPr>
+        <p:spPr>
+          <a:xfrm>
+            <a:off x="7723327" y="91440"/>
+            <a:ext cx="73152" cy="274320"/>
+          </a:xfrm>
+          <a:prstGeom prst="rect">
+            <a:avLst/>
+          </a:prstGeom>
+          <a:solidFill>
+            <a:srgbClr val="0369A1"/>
+          </a:solidFill>
+          <a:ln w="12700">
+            <a:solidFill>
+              <a:srgbClr val="0369A1"/>
+            </a:solidFill>
+            <a:prstDash val="solid"/>
+          </a:ln>
+        </p:spPr>
+      </p:sp>
+      <p:pic>
+        <p:nvPicPr>
+          <p:cNvPr id="19" name="Image 0" descr="preencoded.png">    </p:cNvPr>
+          <p:cNvPicPr>
+            <a:picLocks noChangeAspect="1"/>
+          </p:cNvPicPr>
+          <p:nvPr/>
+        </p:nvPicPr>
+        <p:blipFill>
+          <a:blip r:embed="rId1"/>
+          <a:stretch>
+            <a:fillRect/>
+          </a:stretch>
+        </p:blipFill>
+        <p:spPr>
+          <a:xfrm>
+            <a:off x="7851343" y="128016"/>
+            <a:ext cx="201168" cy="201168"/>
+          </a:xfrm>
+          <a:prstGeom prst="rect">
+            <a:avLst/>
+          </a:prstGeom>
+        </p:spPr>
+      </p:pic>
+      <p:sp>
+        <p:nvSpPr>
+          <p:cNvPr id="20" name="Text 17"/>
+          <p:cNvSpPr txBox="1"/>
+          <p:nvPr/>
+        </p:nvSpPr>
+        <p:spPr>
+          <a:xfrm>
+            <a:off x="8107375" y="91440"/>
+            <a:ext cx="3499104" cy="274320"/>
+          </a:xfrm>
+          <a:prstGeom prst="rect">
+            <a:avLst/>
+          </a:prstGeom>
+          <a:noFill/>
+          <a:ln/>
+        </p:spPr>
+        <p:txBody>
+          <a:bodyPr wrap="square" lIns="0" tIns="0" rIns="0" bIns="0" rtlCol="0" anchor="ctr"/>
+          <a:lstStyle/>
+          <a:p>
+            <a:pPr indent="0" marL="0">
+              <a:buNone/>
+            </a:pPr>
+            <a:r>
+              <a:rPr lang="en-US" sz="1100" b="1" dirty="0">
+                <a:solidFill>
+                  <a:srgbClr val="075985"/>
+                </a:solidFill>
+                <a:latin typeface="Calibri" pitchFamily="34" charset="0"/>
+                <a:ea typeface="Calibri" pitchFamily="34" charset="-122"/>
+                <a:cs typeface="Calibri" pitchFamily="34" charset="-120"/>
+              </a:rPr>
+              <a:t>DA COMPRENDERE OGGI</a:t>
+            </a:r>
+            <a:pPr indent="0" marL="0">
+              <a:buNone/>
+            </a:pPr>
+            <a:r>
+              <a:rPr lang="en-US" sz="1100" dirty="0">
+                <a:solidFill>
+                  <a:srgbClr val="075985"/>
+                </a:solidFill>
+                <a:latin typeface="Calibri" pitchFamily="34" charset="0"/>
+                <a:ea typeface="Calibri" pitchFamily="34" charset="-122"/>
+                <a:cs typeface="Calibri" pitchFamily="34" charset="-120"/>
+              </a:rPr>
+              <a:t> · macchine a stati finiti</a:t>
+            </a:r>
+            <a:endParaRPr lang="en-US" sz="1100" dirty="0"/>
+          </a:p>
+        </p:txBody>
+      </p:sp>
+      <p:sp>
+        <p:nvSpPr>
           <p:cNvPr id="25" name="Slide Number Placeholder 0"/>
           <p:cNvSpPr>
             <a:spLocks noGrp="1"/>
@@ -6900,6 +7468,133 @@
       </p:sp>
       <p:sp>
         <p:nvSpPr>
+          <p:cNvPr id="14" name="Shape 12"/>
+          <p:cNvSpPr/>
+          <p:nvPr/>
+        </p:nvSpPr>
+        <p:spPr>
+          <a:xfrm>
+            <a:off x="7723327" y="91440"/>
+            <a:ext cx="3919728" cy="274320"/>
+          </a:xfrm>
+          <a:prstGeom prst="rect">
+            <a:avLst/>
+          </a:prstGeom>
+          <a:solidFill>
+            <a:srgbClr val="E0F2FE"/>
+          </a:solidFill>
+          <a:ln w="12700">
+            <a:solidFill>
+              <a:srgbClr val="0369A1"/>
+            </a:solidFill>
+            <a:prstDash val="solid"/>
+          </a:ln>
+        </p:spPr>
+      </p:sp>
+      <p:sp>
+        <p:nvSpPr>
+          <p:cNvPr id="15" name="Shape 13"/>
+          <p:cNvSpPr/>
+          <p:nvPr/>
+        </p:nvSpPr>
+        <p:spPr>
+          <a:xfrm>
+            <a:off x="7723327" y="91440"/>
+            <a:ext cx="73152" cy="274320"/>
+          </a:xfrm>
+          <a:prstGeom prst="rect">
+            <a:avLst/>
+          </a:prstGeom>
+          <a:solidFill>
+            <a:srgbClr val="0369A1"/>
+          </a:solidFill>
+          <a:ln w="12700">
+            <a:solidFill>
+              <a:srgbClr val="0369A1"/>
+            </a:solidFill>
+            <a:prstDash val="solid"/>
+          </a:ln>
+        </p:spPr>
+      </p:sp>
+      <p:pic>
+        <p:nvPicPr>
+          <p:cNvPr id="16" name="Image 0" descr="preencoded.png">    </p:cNvPr>
+          <p:cNvPicPr>
+            <a:picLocks noChangeAspect="1"/>
+          </p:cNvPicPr>
+          <p:nvPr/>
+        </p:nvPicPr>
+        <p:blipFill>
+          <a:blip r:embed="rId1"/>
+          <a:stretch>
+            <a:fillRect/>
+          </a:stretch>
+        </p:blipFill>
+        <p:spPr>
+          <a:xfrm>
+            <a:off x="7851343" y="128016"/>
+            <a:ext cx="201168" cy="201168"/>
+          </a:xfrm>
+          <a:prstGeom prst="rect">
+            <a:avLst/>
+          </a:prstGeom>
+        </p:spPr>
+      </p:pic>
+      <p:sp>
+        <p:nvSpPr>
+          <p:cNvPr id="17" name="Text 14"/>
+          <p:cNvSpPr txBox="1"/>
+          <p:nvPr/>
+        </p:nvSpPr>
+        <p:spPr>
+          <a:xfrm>
+            <a:off x="8107375" y="91440"/>
+            <a:ext cx="3499104" cy="274320"/>
+          </a:xfrm>
+          <a:prstGeom prst="rect">
+            <a:avLst/>
+          </a:prstGeom>
+          <a:noFill/>
+          <a:ln/>
+        </p:spPr>
+        <p:txBody>
+          <a:bodyPr wrap="square" lIns="0" tIns="0" rIns="0" bIns="0" rtlCol="0" anchor="ctr"/>
+          <a:lstStyle/>
+          <a:p>
+            <a:pPr indent="0" marL="0">
+              <a:buNone/>
+            </a:pPr>
+            <a:r>
+              <a:rPr lang="en-US" sz="1100" b="1" dirty="0">
+                <a:solidFill>
+                  <a:srgbClr val="075985"/>
+                </a:solidFill>
+                <a:latin typeface="Calibri" pitchFamily="34" charset="0"/>
+                <a:ea typeface="Calibri" pitchFamily="34" charset="-122"/>
+                <a:cs typeface="Calibri" pitchFamily="34" charset="-120"/>
+              </a:rPr>
+              <a:t>DA COMPRENDERE OGGI</a:t>
+            </a:r>
+            <a:pPr indent="0" marL="0">
+              <a:buNone/>
+            </a:pPr>
+            <a:r>
+              <a:rPr lang="en-US" sz="1100" dirty="0">
+                <a:solidFill>
+                  <a:srgbClr val="075985"/>
+                </a:solidFill>
+                <a:latin typeface="Calibri" pitchFamily="34" charset="0"/>
+                <a:ea typeface="Calibri" pitchFamily="34" charset="-122"/>
+                <a:cs typeface="Calibri" pitchFamily="34" charset="-120"/>
+              </a:rPr>
+              <a:t> · macchine a stati finiti</a:t>
+            </a:r>
+            <a:endParaRPr lang="en-US" sz="1100" dirty="0"/>
+          </a:p>
+        </p:txBody>
+      </p:sp>
+      <p:sp>
+        <p:nvSpPr>
           <p:cNvPr id="25" name="Slide Number Placeholder 0"/>
           <p:cNvSpPr>
             <a:spLocks noGrp="1"/>
@@ -9414,6 +10109,133 @@
       </p:sp>
       <p:sp>
         <p:nvSpPr>
+          <p:cNvPr id="17" name="Shape 15"/>
+          <p:cNvSpPr/>
+          <p:nvPr/>
+        </p:nvSpPr>
+        <p:spPr>
+          <a:xfrm>
+            <a:off x="7920304" y="91440"/>
+            <a:ext cx="3722751" cy="274320"/>
+          </a:xfrm>
+          <a:prstGeom prst="rect">
+            <a:avLst/>
+          </a:prstGeom>
+          <a:solidFill>
+            <a:srgbClr val="E0F2FE"/>
+          </a:solidFill>
+          <a:ln w="12700">
+            <a:solidFill>
+              <a:srgbClr val="0369A1"/>
+            </a:solidFill>
+            <a:prstDash val="solid"/>
+          </a:ln>
+        </p:spPr>
+      </p:sp>
+      <p:sp>
+        <p:nvSpPr>
+          <p:cNvPr id="18" name="Shape 16"/>
+          <p:cNvSpPr/>
+          <p:nvPr/>
+        </p:nvSpPr>
+        <p:spPr>
+          <a:xfrm>
+            <a:off x="7920304" y="91440"/>
+            <a:ext cx="73152" cy="274320"/>
+          </a:xfrm>
+          <a:prstGeom prst="rect">
+            <a:avLst/>
+          </a:prstGeom>
+          <a:solidFill>
+            <a:srgbClr val="0369A1"/>
+          </a:solidFill>
+          <a:ln w="12700">
+            <a:solidFill>
+              <a:srgbClr val="0369A1"/>
+            </a:solidFill>
+            <a:prstDash val="solid"/>
+          </a:ln>
+        </p:spPr>
+      </p:sp>
+      <p:pic>
+        <p:nvPicPr>
+          <p:cNvPr id="19" name="Image 0" descr="preencoded.png">    </p:cNvPr>
+          <p:cNvPicPr>
+            <a:picLocks noChangeAspect="1"/>
+          </p:cNvPicPr>
+          <p:nvPr/>
+        </p:nvPicPr>
+        <p:blipFill>
+          <a:blip r:embed="rId1"/>
+          <a:stretch>
+            <a:fillRect/>
+          </a:stretch>
+        </p:blipFill>
+        <p:spPr>
+          <a:xfrm>
+            <a:off x="8048320" y="128016"/>
+            <a:ext cx="201168" cy="201168"/>
+          </a:xfrm>
+          <a:prstGeom prst="rect">
+            <a:avLst/>
+          </a:prstGeom>
+        </p:spPr>
+      </p:pic>
+      <p:sp>
+        <p:nvSpPr>
+          <p:cNvPr id="20" name="Text 17"/>
+          <p:cNvSpPr txBox="1"/>
+          <p:nvPr/>
+        </p:nvSpPr>
+        <p:spPr>
+          <a:xfrm>
+            <a:off x="8304352" y="91440"/>
+            <a:ext cx="3302127" cy="274320"/>
+          </a:xfrm>
+          <a:prstGeom prst="rect">
+            <a:avLst/>
+          </a:prstGeom>
+          <a:noFill/>
+          <a:ln/>
+        </p:spPr>
+        <p:txBody>
+          <a:bodyPr wrap="square" lIns="0" tIns="0" rIns="0" bIns="0" rtlCol="0" anchor="ctr"/>
+          <a:lstStyle/>
+          <a:p>
+            <a:pPr indent="0" marL="0">
+              <a:buNone/>
+            </a:pPr>
+            <a:r>
+              <a:rPr lang="en-US" sz="1100" b="1" dirty="0">
+                <a:solidFill>
+                  <a:srgbClr val="075985"/>
+                </a:solidFill>
+                <a:latin typeface="Calibri" pitchFamily="34" charset="0"/>
+                <a:ea typeface="Calibri" pitchFamily="34" charset="-122"/>
+                <a:cs typeface="Calibri" pitchFamily="34" charset="-120"/>
+              </a:rPr>
+              <a:t>DA COMPRENDERE OGGI</a:t>
+            </a:r>
+            <a:pPr indent="0" marL="0">
+              <a:buNone/>
+            </a:pPr>
+            <a:r>
+              <a:rPr lang="en-US" sz="1100" dirty="0">
+                <a:solidFill>
+                  <a:srgbClr val="075985"/>
+                </a:solidFill>
+                <a:latin typeface="Calibri" pitchFamily="34" charset="0"/>
+                <a:ea typeface="Calibri" pitchFamily="34" charset="-122"/>
+                <a:cs typeface="Calibri" pitchFamily="34" charset="-120"/>
+              </a:rPr>
+              <a:t> · gli array in memoria</a:t>
+            </a:r>
+            <a:endParaRPr lang="en-US" sz="1100" dirty="0"/>
+          </a:p>
+        </p:txBody>
+      </p:sp>
+      <p:sp>
+        <p:nvSpPr>
           <p:cNvPr id="25" name="Slide Number Placeholder 0"/>
           <p:cNvSpPr>
             <a:spLocks noGrp="1"/>
@@ -10287,6 +11109,133 @@
       </p:sp>
       <p:sp>
         <p:nvSpPr>
+          <p:cNvPr id="14" name="Shape 12"/>
+          <p:cNvSpPr/>
+          <p:nvPr/>
+        </p:nvSpPr>
+        <p:spPr>
+          <a:xfrm>
+            <a:off x="7920304" y="91440"/>
+            <a:ext cx="3722751" cy="274320"/>
+          </a:xfrm>
+          <a:prstGeom prst="rect">
+            <a:avLst/>
+          </a:prstGeom>
+          <a:solidFill>
+            <a:srgbClr val="E0F2FE"/>
+          </a:solidFill>
+          <a:ln w="12700">
+            <a:solidFill>
+              <a:srgbClr val="0369A1"/>
+            </a:solidFill>
+            <a:prstDash val="solid"/>
+          </a:ln>
+        </p:spPr>
+      </p:sp>
+      <p:sp>
+        <p:nvSpPr>
+          <p:cNvPr id="15" name="Shape 13"/>
+          <p:cNvSpPr/>
+          <p:nvPr/>
+        </p:nvSpPr>
+        <p:spPr>
+          <a:xfrm>
+            <a:off x="7920304" y="91440"/>
+            <a:ext cx="73152" cy="274320"/>
+          </a:xfrm>
+          <a:prstGeom prst="rect">
+            <a:avLst/>
+          </a:prstGeom>
+          <a:solidFill>
+            <a:srgbClr val="0369A1"/>
+          </a:solidFill>
+          <a:ln w="12700">
+            <a:solidFill>
+              <a:srgbClr val="0369A1"/>
+            </a:solidFill>
+            <a:prstDash val="solid"/>
+          </a:ln>
+        </p:spPr>
+      </p:sp>
+      <p:pic>
+        <p:nvPicPr>
+          <p:cNvPr id="16" name="Image 0" descr="preencoded.png">    </p:cNvPr>
+          <p:cNvPicPr>
+            <a:picLocks noChangeAspect="1"/>
+          </p:cNvPicPr>
+          <p:nvPr/>
+        </p:nvPicPr>
+        <p:blipFill>
+          <a:blip r:embed="rId1"/>
+          <a:stretch>
+            <a:fillRect/>
+          </a:stretch>
+        </p:blipFill>
+        <p:spPr>
+          <a:xfrm>
+            <a:off x="8048320" y="128016"/>
+            <a:ext cx="201168" cy="201168"/>
+          </a:xfrm>
+          <a:prstGeom prst="rect">
+            <a:avLst/>
+          </a:prstGeom>
+        </p:spPr>
+      </p:pic>
+      <p:sp>
+        <p:nvSpPr>
+          <p:cNvPr id="17" name="Text 14"/>
+          <p:cNvSpPr txBox="1"/>
+          <p:nvPr/>
+        </p:nvSpPr>
+        <p:spPr>
+          <a:xfrm>
+            <a:off x="8304352" y="91440"/>
+            <a:ext cx="3302127" cy="274320"/>
+          </a:xfrm>
+          <a:prstGeom prst="rect">
+            <a:avLst/>
+          </a:prstGeom>
+          <a:noFill/>
+          <a:ln/>
+        </p:spPr>
+        <p:txBody>
+          <a:bodyPr wrap="square" lIns="0" tIns="0" rIns="0" bIns="0" rtlCol="0" anchor="ctr"/>
+          <a:lstStyle/>
+          <a:p>
+            <a:pPr indent="0" marL="0">
+              <a:buNone/>
+            </a:pPr>
+            <a:r>
+              <a:rPr lang="en-US" sz="1100" b="1" dirty="0">
+                <a:solidFill>
+                  <a:srgbClr val="075985"/>
+                </a:solidFill>
+                <a:latin typeface="Calibri" pitchFamily="34" charset="0"/>
+                <a:ea typeface="Calibri" pitchFamily="34" charset="-122"/>
+                <a:cs typeface="Calibri" pitchFamily="34" charset="-120"/>
+              </a:rPr>
+              <a:t>DA COMPRENDERE OGGI</a:t>
+            </a:r>
+            <a:pPr indent="0" marL="0">
+              <a:buNone/>
+            </a:pPr>
+            <a:r>
+              <a:rPr lang="en-US" sz="1100" dirty="0">
+                <a:solidFill>
+                  <a:srgbClr val="075985"/>
+                </a:solidFill>
+                <a:latin typeface="Calibri" pitchFamily="34" charset="0"/>
+                <a:ea typeface="Calibri" pitchFamily="34" charset="-122"/>
+                <a:cs typeface="Calibri" pitchFamily="34" charset="-120"/>
+              </a:rPr>
+              <a:t> · gli array in memoria</a:t>
+            </a:r>
+            <a:endParaRPr lang="en-US" sz="1100" dirty="0"/>
+          </a:p>
+        </p:txBody>
+      </p:sp>
+      <p:sp>
+        <p:nvSpPr>
           <p:cNvPr id="25" name="Slide Number Placeholder 0"/>
           <p:cNvSpPr>
             <a:spLocks noGrp="1"/>
@@ -11420,6 +12369,133 @@
       </p:sp>
       <p:sp>
         <p:nvSpPr>
+          <p:cNvPr id="17" name="Shape 15"/>
+          <p:cNvSpPr/>
+          <p:nvPr/>
+        </p:nvSpPr>
+        <p:spPr>
+          <a:xfrm>
+            <a:off x="7920304" y="91440"/>
+            <a:ext cx="3722751" cy="274320"/>
+          </a:xfrm>
+          <a:prstGeom prst="rect">
+            <a:avLst/>
+          </a:prstGeom>
+          <a:solidFill>
+            <a:srgbClr val="E0F2FE"/>
+          </a:solidFill>
+          <a:ln w="12700">
+            <a:solidFill>
+              <a:srgbClr val="0369A1"/>
+            </a:solidFill>
+            <a:prstDash val="solid"/>
+          </a:ln>
+        </p:spPr>
+      </p:sp>
+      <p:sp>
+        <p:nvSpPr>
+          <p:cNvPr id="18" name="Shape 16"/>
+          <p:cNvSpPr/>
+          <p:nvPr/>
+        </p:nvSpPr>
+        <p:spPr>
+          <a:xfrm>
+            <a:off x="7920304" y="91440"/>
+            <a:ext cx="73152" cy="274320"/>
+          </a:xfrm>
+          <a:prstGeom prst="rect">
+            <a:avLst/>
+          </a:prstGeom>
+          <a:solidFill>
+            <a:srgbClr val="0369A1"/>
+          </a:solidFill>
+          <a:ln w="12700">
+            <a:solidFill>
+              <a:srgbClr val="0369A1"/>
+            </a:solidFill>
+            <a:prstDash val="solid"/>
+          </a:ln>
+        </p:spPr>
+      </p:sp>
+      <p:pic>
+        <p:nvPicPr>
+          <p:cNvPr id="19" name="Image 0" descr="preencoded.png">    </p:cNvPr>
+          <p:cNvPicPr>
+            <a:picLocks noChangeAspect="1"/>
+          </p:cNvPicPr>
+          <p:nvPr/>
+        </p:nvPicPr>
+        <p:blipFill>
+          <a:blip r:embed="rId1"/>
+          <a:stretch>
+            <a:fillRect/>
+          </a:stretch>
+        </p:blipFill>
+        <p:spPr>
+          <a:xfrm>
+            <a:off x="8048320" y="128016"/>
+            <a:ext cx="201168" cy="201168"/>
+          </a:xfrm>
+          <a:prstGeom prst="rect">
+            <a:avLst/>
+          </a:prstGeom>
+        </p:spPr>
+      </p:pic>
+      <p:sp>
+        <p:nvSpPr>
+          <p:cNvPr id="20" name="Text 17"/>
+          <p:cNvSpPr txBox="1"/>
+          <p:nvPr/>
+        </p:nvSpPr>
+        <p:spPr>
+          <a:xfrm>
+            <a:off x="8304352" y="91440"/>
+            <a:ext cx="3302127" cy="274320"/>
+          </a:xfrm>
+          <a:prstGeom prst="rect">
+            <a:avLst/>
+          </a:prstGeom>
+          <a:noFill/>
+          <a:ln/>
+        </p:spPr>
+        <p:txBody>
+          <a:bodyPr wrap="square" lIns="0" tIns="0" rIns="0" bIns="0" rtlCol="0" anchor="ctr"/>
+          <a:lstStyle/>
+          <a:p>
+            <a:pPr indent="0" marL="0">
+              <a:buNone/>
+            </a:pPr>
+            <a:r>
+              <a:rPr lang="en-US" sz="1100" b="1" dirty="0">
+                <a:solidFill>
+                  <a:srgbClr val="075985"/>
+                </a:solidFill>
+                <a:latin typeface="Calibri" pitchFamily="34" charset="0"/>
+                <a:ea typeface="Calibri" pitchFamily="34" charset="-122"/>
+                <a:cs typeface="Calibri" pitchFamily="34" charset="-120"/>
+              </a:rPr>
+              <a:t>DA COMPRENDERE OGGI</a:t>
+            </a:r>
+            <a:pPr indent="0" marL="0">
+              <a:buNone/>
+            </a:pPr>
+            <a:r>
+              <a:rPr lang="en-US" sz="1100" dirty="0">
+                <a:solidFill>
+                  <a:srgbClr val="075985"/>
+                </a:solidFill>
+                <a:latin typeface="Calibri" pitchFamily="34" charset="0"/>
+                <a:ea typeface="Calibri" pitchFamily="34" charset="-122"/>
+                <a:cs typeface="Calibri" pitchFamily="34" charset="-120"/>
+              </a:rPr>
+              <a:t> · gli array in memoria</a:t>
+            </a:r>
+            <a:endParaRPr lang="en-US" sz="1100" dirty="0"/>
+          </a:p>
+        </p:txBody>
+      </p:sp>
+      <p:sp>
+        <p:nvSpPr>
           <p:cNvPr id="25" name="Slide Number Placeholder 0"/>
           <p:cNvSpPr>
             <a:spLocks noGrp="1"/>
@@ -12307,6 +13383,172 @@
       </p:sp>
       <p:sp>
         <p:nvSpPr>
+          <p:cNvPr id="14" name="Shape 12"/>
+          <p:cNvSpPr/>
+          <p:nvPr/>
+        </p:nvSpPr>
+        <p:spPr>
+          <a:xfrm>
+            <a:off x="6650431" y="91440"/>
+            <a:ext cx="4992624" cy="274320"/>
+          </a:xfrm>
+          <a:prstGeom prst="rect">
+            <a:avLst/>
+          </a:prstGeom>
+          <a:solidFill>
+            <a:srgbClr val="FEF3C7"/>
+          </a:solidFill>
+          <a:ln w="12700">
+            <a:solidFill>
+              <a:srgbClr val="B45309"/>
+            </a:solidFill>
+            <a:prstDash val="solid"/>
+          </a:ln>
+        </p:spPr>
+      </p:sp>
+      <p:sp>
+        <p:nvSpPr>
+          <p:cNvPr id="15" name="Shape 13"/>
+          <p:cNvSpPr/>
+          <p:nvPr/>
+        </p:nvSpPr>
+        <p:spPr>
+          <a:xfrm>
+            <a:off x="6650431" y="91440"/>
+            <a:ext cx="27432" cy="274320"/>
+          </a:xfrm>
+          <a:prstGeom prst="rect">
+            <a:avLst/>
+          </a:prstGeom>
+          <a:solidFill>
+            <a:srgbClr val="B45309"/>
+          </a:solidFill>
+          <a:ln w="12700">
+            <a:solidFill>
+              <a:srgbClr val="B45309"/>
+            </a:solidFill>
+            <a:prstDash val="solid"/>
+          </a:ln>
+        </p:spPr>
+      </p:sp>
+      <p:sp>
+        <p:nvSpPr>
+          <p:cNvPr id="16" name="Shape 14"/>
+          <p:cNvSpPr/>
+          <p:nvPr/>
+        </p:nvSpPr>
+        <p:spPr>
+          <a:xfrm>
+            <a:off x="6705295" y="91440"/>
+            <a:ext cx="27432" cy="274320"/>
+          </a:xfrm>
+          <a:prstGeom prst="rect">
+            <a:avLst/>
+          </a:prstGeom>
+          <a:solidFill>
+            <a:srgbClr val="B45309"/>
+          </a:solidFill>
+          <a:ln w="12700">
+            <a:solidFill>
+              <a:srgbClr val="B45309"/>
+            </a:solidFill>
+            <a:prstDash val="solid"/>
+          </a:ln>
+        </p:spPr>
+      </p:sp>
+      <p:pic>
+        <p:nvPicPr>
+          <p:cNvPr id="17" name="Image 0" descr="preencoded.png">    </p:cNvPr>
+          <p:cNvPicPr>
+            <a:picLocks noChangeAspect="1"/>
+          </p:cNvPicPr>
+          <p:nvPr/>
+        </p:nvPicPr>
+        <p:blipFill>
+          <a:blip r:embed="rId1"/>
+          <a:stretch>
+            <a:fillRect/>
+          </a:stretch>
+        </p:blipFill>
+        <p:spPr>
+          <a:xfrm>
+            <a:off x="6778447" y="128016"/>
+            <a:ext cx="201168" cy="201168"/>
+          </a:xfrm>
+          <a:prstGeom prst="rect">
+            <a:avLst/>
+          </a:prstGeom>
+        </p:spPr>
+      </p:pic>
+      <p:sp>
+        <p:nvSpPr>
+          <p:cNvPr id="18" name="Text 15"/>
+          <p:cNvSpPr txBox="1"/>
+          <p:nvPr/>
+        </p:nvSpPr>
+        <p:spPr>
+          <a:xfrm>
+            <a:off x="7034479" y="91440"/>
+            <a:ext cx="4572000" cy="274320"/>
+          </a:xfrm>
+          <a:prstGeom prst="rect">
+            <a:avLst/>
+          </a:prstGeom>
+          <a:noFill/>
+          <a:ln/>
+        </p:spPr>
+        <p:txBody>
+          <a:bodyPr wrap="square" lIns="0" tIns="0" rIns="0" bIns="0" rtlCol="0" anchor="ctr"/>
+          <a:lstStyle/>
+          <a:p>
+            <a:pPr indent="0" marL="0">
+              <a:buNone/>
+            </a:pPr>
+            <a:r>
+              <a:rPr lang="en-US" sz="1100" b="1" dirty="0">
+                <a:solidFill>
+                  <a:srgbClr val="92400E"/>
+                </a:solidFill>
+                <a:latin typeface="Calibri" pitchFamily="34" charset="0"/>
+                <a:ea typeface="Calibri" pitchFamily="34" charset="-122"/>
+                <a:cs typeface="Calibri" pitchFamily="34" charset="-120"/>
+              </a:rPr>
+              <a:t>DA UTILIZZARE OGGI</a:t>
+            </a:r>
+            <a:pPr indent="0" marL="0">
+              <a:buNone/>
+            </a:pPr>
+            <a:r>
+              <a:rPr lang="en-US" sz="1100" dirty="0">
+                <a:solidFill>
+                  <a:srgbClr val="92400E"/>
+                </a:solidFill>
+                <a:latin typeface="Calibri" pitchFamily="34" charset="0"/>
+                <a:ea typeface="Calibri" pitchFamily="34" charset="-122"/>
+                <a:cs typeface="Calibri" pitchFamily="34" charset="-120"/>
+              </a:rPr>
+              <a:t> · la convenzione di chiamata</a:t>
+            </a:r>
+            <a:pPr indent="0" marL="0">
+              <a:buNone/>
+            </a:pPr>
+            <a:r>
+              <a:rPr lang="en-US" sz="1100" b="1" dirty="0">
+                <a:solidFill>
+                  <a:srgbClr val="92400E"/>
+                </a:solidFill>
+                <a:latin typeface="Calibri" pitchFamily="34" charset="0"/>
+                <a:ea typeface="Calibri" pitchFamily="34" charset="-122"/>
+                <a:cs typeface="Calibri" pitchFamily="34" charset="-120"/>
+              </a:rPr>
+              <a:t> → Lezione 18</a:t>
+            </a:r>
+            <a:endParaRPr lang="en-US" sz="1100" dirty="0"/>
+          </a:p>
+        </p:txBody>
+      </p:sp>
+      <p:sp>
+        <p:nvSpPr>
           <p:cNvPr id="25" name="Slide Number Placeholder 0"/>
           <p:cNvSpPr>
             <a:spLocks noGrp="1"/>
@@ -14905,6 +16147,133 @@
       </p:sp>
       <p:sp>
         <p:nvSpPr>
+          <p:cNvPr id="14" name="Shape 12"/>
+          <p:cNvSpPr/>
+          <p:nvPr/>
+        </p:nvSpPr>
+        <p:spPr>
+          <a:xfrm>
+            <a:off x="8182940" y="91440"/>
+            <a:ext cx="3460115" cy="274320"/>
+          </a:xfrm>
+          <a:prstGeom prst="rect">
+            <a:avLst/>
+          </a:prstGeom>
+          <a:solidFill>
+            <a:srgbClr val="E0F2FE"/>
+          </a:solidFill>
+          <a:ln w="12700">
+            <a:solidFill>
+              <a:srgbClr val="0369A1"/>
+            </a:solidFill>
+            <a:prstDash val="solid"/>
+          </a:ln>
+        </p:spPr>
+      </p:sp>
+      <p:sp>
+        <p:nvSpPr>
+          <p:cNvPr id="15" name="Shape 13"/>
+          <p:cNvSpPr/>
+          <p:nvPr/>
+        </p:nvSpPr>
+        <p:spPr>
+          <a:xfrm>
+            <a:off x="8182940" y="91440"/>
+            <a:ext cx="73152" cy="274320"/>
+          </a:xfrm>
+          <a:prstGeom prst="rect">
+            <a:avLst/>
+          </a:prstGeom>
+          <a:solidFill>
+            <a:srgbClr val="0369A1"/>
+          </a:solidFill>
+          <a:ln w="12700">
+            <a:solidFill>
+              <a:srgbClr val="0369A1"/>
+            </a:solidFill>
+            <a:prstDash val="solid"/>
+          </a:ln>
+        </p:spPr>
+      </p:sp>
+      <p:pic>
+        <p:nvPicPr>
+          <p:cNvPr id="16" name="Image 0" descr="preencoded.png">    </p:cNvPr>
+          <p:cNvPicPr>
+            <a:picLocks noChangeAspect="1"/>
+          </p:cNvPicPr>
+          <p:nvPr/>
+        </p:nvPicPr>
+        <p:blipFill>
+          <a:blip r:embed="rId1"/>
+          <a:stretch>
+            <a:fillRect/>
+          </a:stretch>
+        </p:blipFill>
+        <p:spPr>
+          <a:xfrm>
+            <a:off x="8310956" y="128016"/>
+            <a:ext cx="201168" cy="201168"/>
+          </a:xfrm>
+          <a:prstGeom prst="rect">
+            <a:avLst/>
+          </a:prstGeom>
+        </p:spPr>
+      </p:pic>
+      <p:sp>
+        <p:nvSpPr>
+          <p:cNvPr id="17" name="Text 14"/>
+          <p:cNvSpPr txBox="1"/>
+          <p:nvPr/>
+        </p:nvSpPr>
+        <p:spPr>
+          <a:xfrm>
+            <a:off x="8566988" y="91440"/>
+            <a:ext cx="3039491" cy="274320"/>
+          </a:xfrm>
+          <a:prstGeom prst="rect">
+            <a:avLst/>
+          </a:prstGeom>
+          <a:noFill/>
+          <a:ln/>
+        </p:spPr>
+        <p:txBody>
+          <a:bodyPr wrap="square" lIns="0" tIns="0" rIns="0" bIns="0" rtlCol="0" anchor="ctr"/>
+          <a:lstStyle/>
+          <a:p>
+            <a:pPr indent="0" marL="0">
+              <a:buNone/>
+            </a:pPr>
+            <a:r>
+              <a:rPr lang="en-US" sz="1100" b="1" dirty="0">
+                <a:solidFill>
+                  <a:srgbClr val="075985"/>
+                </a:solidFill>
+                <a:latin typeface="Calibri" pitchFamily="34" charset="0"/>
+                <a:ea typeface="Calibri" pitchFamily="34" charset="-122"/>
+                <a:cs typeface="Calibri" pitchFamily="34" charset="-120"/>
+              </a:rPr>
+              <a:t>DA COMPRENDERE OGGI</a:t>
+            </a:r>
+            <a:pPr indent="0" marL="0">
+              <a:buNone/>
+            </a:pPr>
+            <a:r>
+              <a:rPr lang="en-US" sz="1100" dirty="0">
+                <a:solidFill>
+                  <a:srgbClr val="075985"/>
+                </a:solidFill>
+                <a:latin typeface="Calibri" pitchFamily="34" charset="0"/>
+                <a:ea typeface="Calibri" pitchFamily="34" charset="-122"/>
+                <a:cs typeface="Calibri" pitchFamily="34" charset="-120"/>
+              </a:rPr>
+              <a:t> · la virgola fissa</a:t>
+            </a:r>
+            <a:endParaRPr lang="en-US" sz="1100" dirty="0"/>
+          </a:p>
+        </p:txBody>
+      </p:sp>
+      <p:sp>
+        <p:nvSpPr>
           <p:cNvPr id="25" name="Slide Number Placeholder 0"/>
           <p:cNvSpPr>
             <a:spLocks noGrp="1"/>
@@ -15557,6 +16926,133 @@
       </p:sp>
       <p:sp>
         <p:nvSpPr>
+          <p:cNvPr id="11" name="Shape 9"/>
+          <p:cNvSpPr/>
+          <p:nvPr/>
+        </p:nvSpPr>
+        <p:spPr>
+          <a:xfrm>
+            <a:off x="8182940" y="91440"/>
+            <a:ext cx="3460115" cy="274320"/>
+          </a:xfrm>
+          <a:prstGeom prst="rect">
+            <a:avLst/>
+          </a:prstGeom>
+          <a:solidFill>
+            <a:srgbClr val="E0F2FE"/>
+          </a:solidFill>
+          <a:ln w="12700">
+            <a:solidFill>
+              <a:srgbClr val="0369A1"/>
+            </a:solidFill>
+            <a:prstDash val="solid"/>
+          </a:ln>
+        </p:spPr>
+      </p:sp>
+      <p:sp>
+        <p:nvSpPr>
+          <p:cNvPr id="12" name="Shape 10"/>
+          <p:cNvSpPr/>
+          <p:nvPr/>
+        </p:nvSpPr>
+        <p:spPr>
+          <a:xfrm>
+            <a:off x="8182940" y="91440"/>
+            <a:ext cx="73152" cy="274320"/>
+          </a:xfrm>
+          <a:prstGeom prst="rect">
+            <a:avLst/>
+          </a:prstGeom>
+          <a:solidFill>
+            <a:srgbClr val="0369A1"/>
+          </a:solidFill>
+          <a:ln w="12700">
+            <a:solidFill>
+              <a:srgbClr val="0369A1"/>
+            </a:solidFill>
+            <a:prstDash val="solid"/>
+          </a:ln>
+        </p:spPr>
+      </p:sp>
+      <p:pic>
+        <p:nvPicPr>
+          <p:cNvPr id="13" name="Image 0" descr="preencoded.png">    </p:cNvPr>
+          <p:cNvPicPr>
+            <a:picLocks noChangeAspect="1"/>
+          </p:cNvPicPr>
+          <p:nvPr/>
+        </p:nvPicPr>
+        <p:blipFill>
+          <a:blip r:embed="rId1"/>
+          <a:stretch>
+            <a:fillRect/>
+          </a:stretch>
+        </p:blipFill>
+        <p:spPr>
+          <a:xfrm>
+            <a:off x="8310956" y="128016"/>
+            <a:ext cx="201168" cy="201168"/>
+          </a:xfrm>
+          <a:prstGeom prst="rect">
+            <a:avLst/>
+          </a:prstGeom>
+        </p:spPr>
+      </p:pic>
+      <p:sp>
+        <p:nvSpPr>
+          <p:cNvPr id="14" name="Text 11"/>
+          <p:cNvSpPr txBox="1"/>
+          <p:nvPr/>
+        </p:nvSpPr>
+        <p:spPr>
+          <a:xfrm>
+            <a:off x="8566988" y="91440"/>
+            <a:ext cx="3039491" cy="274320"/>
+          </a:xfrm>
+          <a:prstGeom prst="rect">
+            <a:avLst/>
+          </a:prstGeom>
+          <a:noFill/>
+          <a:ln/>
+        </p:spPr>
+        <p:txBody>
+          <a:bodyPr wrap="square" lIns="0" tIns="0" rIns="0" bIns="0" rtlCol="0" anchor="ctr"/>
+          <a:lstStyle/>
+          <a:p>
+            <a:pPr indent="0" marL="0">
+              <a:buNone/>
+            </a:pPr>
+            <a:r>
+              <a:rPr lang="en-US" sz="1100" b="1" dirty="0">
+                <a:solidFill>
+                  <a:srgbClr val="075985"/>
+                </a:solidFill>
+                <a:latin typeface="Calibri" pitchFamily="34" charset="0"/>
+                <a:ea typeface="Calibri" pitchFamily="34" charset="-122"/>
+                <a:cs typeface="Calibri" pitchFamily="34" charset="-120"/>
+              </a:rPr>
+              <a:t>DA COMPRENDERE OGGI</a:t>
+            </a:r>
+            <a:pPr indent="0" marL="0">
+              <a:buNone/>
+            </a:pPr>
+            <a:r>
+              <a:rPr lang="en-US" sz="1100" dirty="0">
+                <a:solidFill>
+                  <a:srgbClr val="075985"/>
+                </a:solidFill>
+                <a:latin typeface="Calibri" pitchFamily="34" charset="0"/>
+                <a:ea typeface="Calibri" pitchFamily="34" charset="-122"/>
+                <a:cs typeface="Calibri" pitchFamily="34" charset="-120"/>
+              </a:rPr>
+              <a:t> · la virgola fissa</a:t>
+            </a:r>
+            <a:endParaRPr lang="en-US" sz="1100" dirty="0"/>
+          </a:p>
+        </p:txBody>
+      </p:sp>
+      <p:sp>
+        <p:nvSpPr>
           <p:cNvPr id="25" name="Slide Number Placeholder 0"/>
           <p:cNvSpPr>
             <a:spLocks noGrp="1"/>
@@ -16559,6 +18055,172 @@
       </p:sp>
       <p:sp>
         <p:nvSpPr>
+          <p:cNvPr id="17" name="Shape 15"/>
+          <p:cNvSpPr/>
+          <p:nvPr/>
+        </p:nvSpPr>
+        <p:spPr>
+          <a:xfrm>
+            <a:off x="6650431" y="91440"/>
+            <a:ext cx="4992624" cy="274320"/>
+          </a:xfrm>
+          <a:prstGeom prst="rect">
+            <a:avLst/>
+          </a:prstGeom>
+          <a:solidFill>
+            <a:srgbClr val="FEF3C7"/>
+          </a:solidFill>
+          <a:ln w="12700">
+            <a:solidFill>
+              <a:srgbClr val="B45309"/>
+            </a:solidFill>
+            <a:prstDash val="solid"/>
+          </a:ln>
+        </p:spPr>
+      </p:sp>
+      <p:sp>
+        <p:nvSpPr>
+          <p:cNvPr id="18" name="Shape 16"/>
+          <p:cNvSpPr/>
+          <p:nvPr/>
+        </p:nvSpPr>
+        <p:spPr>
+          <a:xfrm>
+            <a:off x="6650431" y="91440"/>
+            <a:ext cx="27432" cy="274320"/>
+          </a:xfrm>
+          <a:prstGeom prst="rect">
+            <a:avLst/>
+          </a:prstGeom>
+          <a:solidFill>
+            <a:srgbClr val="B45309"/>
+          </a:solidFill>
+          <a:ln w="12700">
+            <a:solidFill>
+              <a:srgbClr val="B45309"/>
+            </a:solidFill>
+            <a:prstDash val="solid"/>
+          </a:ln>
+        </p:spPr>
+      </p:sp>
+      <p:sp>
+        <p:nvSpPr>
+          <p:cNvPr id="19" name="Shape 17"/>
+          <p:cNvSpPr/>
+          <p:nvPr/>
+        </p:nvSpPr>
+        <p:spPr>
+          <a:xfrm>
+            <a:off x="6705295" y="91440"/>
+            <a:ext cx="27432" cy="274320"/>
+          </a:xfrm>
+          <a:prstGeom prst="rect">
+            <a:avLst/>
+          </a:prstGeom>
+          <a:solidFill>
+            <a:srgbClr val="B45309"/>
+          </a:solidFill>
+          <a:ln w="12700">
+            <a:solidFill>
+              <a:srgbClr val="B45309"/>
+            </a:solidFill>
+            <a:prstDash val="solid"/>
+          </a:ln>
+        </p:spPr>
+      </p:sp>
+      <p:pic>
+        <p:nvPicPr>
+          <p:cNvPr id="20" name="Image 0" descr="preencoded.png">    </p:cNvPr>
+          <p:cNvPicPr>
+            <a:picLocks noChangeAspect="1"/>
+          </p:cNvPicPr>
+          <p:nvPr/>
+        </p:nvPicPr>
+        <p:blipFill>
+          <a:blip r:embed="rId1"/>
+          <a:stretch>
+            <a:fillRect/>
+          </a:stretch>
+        </p:blipFill>
+        <p:spPr>
+          <a:xfrm>
+            <a:off x="6778447" y="128016"/>
+            <a:ext cx="201168" cy="201168"/>
+          </a:xfrm>
+          <a:prstGeom prst="rect">
+            <a:avLst/>
+          </a:prstGeom>
+        </p:spPr>
+      </p:pic>
+      <p:sp>
+        <p:nvSpPr>
+          <p:cNvPr id="21" name="Text 18"/>
+          <p:cNvSpPr txBox="1"/>
+          <p:nvPr/>
+        </p:nvSpPr>
+        <p:spPr>
+          <a:xfrm>
+            <a:off x="7034479" y="91440"/>
+            <a:ext cx="4572000" cy="274320"/>
+          </a:xfrm>
+          <a:prstGeom prst="rect">
+            <a:avLst/>
+          </a:prstGeom>
+          <a:noFill/>
+          <a:ln/>
+        </p:spPr>
+        <p:txBody>
+          <a:bodyPr wrap="square" lIns="0" tIns="0" rIns="0" bIns="0" rtlCol="0" anchor="ctr"/>
+          <a:lstStyle/>
+          <a:p>
+            <a:pPr indent="0" marL="0">
+              <a:buNone/>
+            </a:pPr>
+            <a:r>
+              <a:rPr lang="en-US" sz="1100" b="1" dirty="0">
+                <a:solidFill>
+                  <a:srgbClr val="92400E"/>
+                </a:solidFill>
+                <a:latin typeface="Calibri" pitchFamily="34" charset="0"/>
+                <a:ea typeface="Calibri" pitchFamily="34" charset="-122"/>
+                <a:cs typeface="Calibri" pitchFamily="34" charset="-120"/>
+              </a:rPr>
+              <a:t>DA UTILIZZARE OGGI</a:t>
+            </a:r>
+            <a:pPr indent="0" marL="0">
+              <a:buNone/>
+            </a:pPr>
+            <a:r>
+              <a:rPr lang="en-US" sz="1100" dirty="0">
+                <a:solidFill>
+                  <a:srgbClr val="92400E"/>
+                </a:solidFill>
+                <a:latin typeface="Calibri" pitchFamily="34" charset="0"/>
+                <a:ea typeface="Calibri" pitchFamily="34" charset="-122"/>
+                <a:cs typeface="Calibri" pitchFamily="34" charset="-120"/>
+              </a:rPr>
+              <a:t> · la convenzione di chiamata</a:t>
+            </a:r>
+            <a:pPr indent="0" marL="0">
+              <a:buNone/>
+            </a:pPr>
+            <a:r>
+              <a:rPr lang="en-US" sz="1100" b="1" dirty="0">
+                <a:solidFill>
+                  <a:srgbClr val="92400E"/>
+                </a:solidFill>
+                <a:latin typeface="Calibri" pitchFamily="34" charset="0"/>
+                <a:ea typeface="Calibri" pitchFamily="34" charset="-122"/>
+                <a:cs typeface="Calibri" pitchFamily="34" charset="-120"/>
+              </a:rPr>
+              <a:t> → Lezione 18</a:t>
+            </a:r>
+            <a:endParaRPr lang="en-US" sz="1100" dirty="0"/>
+          </a:p>
+        </p:txBody>
+      </p:sp>
+      <p:sp>
+        <p:nvSpPr>
           <p:cNvPr id="25" name="Slide Number Placeholder 0"/>
           <p:cNvSpPr>
             <a:spLocks noGrp="1"/>
@@ -17573,6 +19235,133 @@
       </p:sp>
       <p:sp>
         <p:nvSpPr>
+          <p:cNvPr id="17" name="Shape 15"/>
+          <p:cNvSpPr/>
+          <p:nvPr/>
+        </p:nvSpPr>
+        <p:spPr>
+          <a:xfrm>
+            <a:off x="7920304" y="91440"/>
+            <a:ext cx="3722751" cy="274320"/>
+          </a:xfrm>
+          <a:prstGeom prst="rect">
+            <a:avLst/>
+          </a:prstGeom>
+          <a:solidFill>
+            <a:srgbClr val="E0F2FE"/>
+          </a:solidFill>
+          <a:ln w="12700">
+            <a:solidFill>
+              <a:srgbClr val="0369A1"/>
+            </a:solidFill>
+            <a:prstDash val="solid"/>
+          </a:ln>
+        </p:spPr>
+      </p:sp>
+      <p:sp>
+        <p:nvSpPr>
+          <p:cNvPr id="18" name="Shape 16"/>
+          <p:cNvSpPr/>
+          <p:nvPr/>
+        </p:nvSpPr>
+        <p:spPr>
+          <a:xfrm>
+            <a:off x="7920304" y="91440"/>
+            <a:ext cx="73152" cy="274320"/>
+          </a:xfrm>
+          <a:prstGeom prst="rect">
+            <a:avLst/>
+          </a:prstGeom>
+          <a:solidFill>
+            <a:srgbClr val="0369A1"/>
+          </a:solidFill>
+          <a:ln w="12700">
+            <a:solidFill>
+              <a:srgbClr val="0369A1"/>
+            </a:solidFill>
+            <a:prstDash val="solid"/>
+          </a:ln>
+        </p:spPr>
+      </p:sp>
+      <p:pic>
+        <p:nvPicPr>
+          <p:cNvPr id="19" name="Image 0" descr="preencoded.png">    </p:cNvPr>
+          <p:cNvPicPr>
+            <a:picLocks noChangeAspect="1"/>
+          </p:cNvPicPr>
+          <p:nvPr/>
+        </p:nvPicPr>
+        <p:blipFill>
+          <a:blip r:embed="rId1"/>
+          <a:stretch>
+            <a:fillRect/>
+          </a:stretch>
+        </p:blipFill>
+        <p:spPr>
+          <a:xfrm>
+            <a:off x="8048320" y="128016"/>
+            <a:ext cx="201168" cy="201168"/>
+          </a:xfrm>
+          <a:prstGeom prst="rect">
+            <a:avLst/>
+          </a:prstGeom>
+        </p:spPr>
+      </p:pic>
+      <p:sp>
+        <p:nvSpPr>
+          <p:cNvPr id="20" name="Text 17"/>
+          <p:cNvSpPr txBox="1"/>
+          <p:nvPr/>
+        </p:nvSpPr>
+        <p:spPr>
+          <a:xfrm>
+            <a:off x="8304352" y="91440"/>
+            <a:ext cx="3302127" cy="274320"/>
+          </a:xfrm>
+          <a:prstGeom prst="rect">
+            <a:avLst/>
+          </a:prstGeom>
+          <a:noFill/>
+          <a:ln/>
+        </p:spPr>
+        <p:txBody>
+          <a:bodyPr wrap="square" lIns="0" tIns="0" rIns="0" bIns="0" rtlCol="0" anchor="ctr"/>
+          <a:lstStyle/>
+          <a:p>
+            <a:pPr indent="0" marL="0">
+              <a:buNone/>
+            </a:pPr>
+            <a:r>
+              <a:rPr lang="en-US" sz="1100" b="1" dirty="0">
+                <a:solidFill>
+                  <a:srgbClr val="075985"/>
+                </a:solidFill>
+                <a:latin typeface="Calibri" pitchFamily="34" charset="0"/>
+                <a:ea typeface="Calibri" pitchFamily="34" charset="-122"/>
+                <a:cs typeface="Calibri" pitchFamily="34" charset="-120"/>
+              </a:rPr>
+              <a:t>DA COMPRENDERE OGGI</a:t>
+            </a:r>
+            <a:pPr indent="0" marL="0">
+              <a:buNone/>
+            </a:pPr>
+            <a:r>
+              <a:rPr lang="en-US" sz="1100" dirty="0">
+                <a:solidFill>
+                  <a:srgbClr val="075985"/>
+                </a:solidFill>
+                <a:latin typeface="Calibri" pitchFamily="34" charset="0"/>
+                <a:ea typeface="Calibri" pitchFamily="34" charset="-122"/>
+                <a:cs typeface="Calibri" pitchFamily="34" charset="-120"/>
+              </a:rPr>
+              <a:t> · gli array in memoria</a:t>
+            </a:r>
+            <a:endParaRPr lang="en-US" sz="1100" dirty="0"/>
+          </a:p>
+        </p:txBody>
+      </p:sp>
+      <p:sp>
+        <p:nvSpPr>
           <p:cNvPr id="25" name="Slide Number Placeholder 0"/>
           <p:cNvSpPr>
             <a:spLocks noGrp="1"/>
@@ -18700,6 +20489,133 @@
       </p:sp>
       <p:sp>
         <p:nvSpPr>
+          <p:cNvPr id="17" name="Shape 15"/>
+          <p:cNvSpPr/>
+          <p:nvPr/>
+        </p:nvSpPr>
+        <p:spPr>
+          <a:xfrm>
+            <a:off x="7920304" y="91440"/>
+            <a:ext cx="3722751" cy="274320"/>
+          </a:xfrm>
+          <a:prstGeom prst="rect">
+            <a:avLst/>
+          </a:prstGeom>
+          <a:solidFill>
+            <a:srgbClr val="E0F2FE"/>
+          </a:solidFill>
+          <a:ln w="12700">
+            <a:solidFill>
+              <a:srgbClr val="0369A1"/>
+            </a:solidFill>
+            <a:prstDash val="solid"/>
+          </a:ln>
+        </p:spPr>
+      </p:sp>
+      <p:sp>
+        <p:nvSpPr>
+          <p:cNvPr id="18" name="Shape 16"/>
+          <p:cNvSpPr/>
+          <p:nvPr/>
+        </p:nvSpPr>
+        <p:spPr>
+          <a:xfrm>
+            <a:off x="7920304" y="91440"/>
+            <a:ext cx="73152" cy="274320"/>
+          </a:xfrm>
+          <a:prstGeom prst="rect">
+            <a:avLst/>
+          </a:prstGeom>
+          <a:solidFill>
+            <a:srgbClr val="0369A1"/>
+          </a:solidFill>
+          <a:ln w="12700">
+            <a:solidFill>
+              <a:srgbClr val="0369A1"/>
+            </a:solidFill>
+            <a:prstDash val="solid"/>
+          </a:ln>
+        </p:spPr>
+      </p:sp>
+      <p:pic>
+        <p:nvPicPr>
+          <p:cNvPr id="19" name="Image 0" descr="preencoded.png">    </p:cNvPr>
+          <p:cNvPicPr>
+            <a:picLocks noChangeAspect="1"/>
+          </p:cNvPicPr>
+          <p:nvPr/>
+        </p:nvPicPr>
+        <p:blipFill>
+          <a:blip r:embed="rId1"/>
+          <a:stretch>
+            <a:fillRect/>
+          </a:stretch>
+        </p:blipFill>
+        <p:spPr>
+          <a:xfrm>
+            <a:off x="8048320" y="128016"/>
+            <a:ext cx="201168" cy="201168"/>
+          </a:xfrm>
+          <a:prstGeom prst="rect">
+            <a:avLst/>
+          </a:prstGeom>
+        </p:spPr>
+      </p:pic>
+      <p:sp>
+        <p:nvSpPr>
+          <p:cNvPr id="20" name="Text 17"/>
+          <p:cNvSpPr txBox="1"/>
+          <p:nvPr/>
+        </p:nvSpPr>
+        <p:spPr>
+          <a:xfrm>
+            <a:off x="8304352" y="91440"/>
+            <a:ext cx="3302127" cy="274320"/>
+          </a:xfrm>
+          <a:prstGeom prst="rect">
+            <a:avLst/>
+          </a:prstGeom>
+          <a:noFill/>
+          <a:ln/>
+        </p:spPr>
+        <p:txBody>
+          <a:bodyPr wrap="square" lIns="0" tIns="0" rIns="0" bIns="0" rtlCol="0" anchor="ctr"/>
+          <a:lstStyle/>
+          <a:p>
+            <a:pPr indent="0" marL="0">
+              <a:buNone/>
+            </a:pPr>
+            <a:r>
+              <a:rPr lang="en-US" sz="1100" b="1" dirty="0">
+                <a:solidFill>
+                  <a:srgbClr val="075985"/>
+                </a:solidFill>
+                <a:latin typeface="Calibri" pitchFamily="34" charset="0"/>
+                <a:ea typeface="Calibri" pitchFamily="34" charset="-122"/>
+                <a:cs typeface="Calibri" pitchFamily="34" charset="-120"/>
+              </a:rPr>
+              <a:t>DA COMPRENDERE OGGI</a:t>
+            </a:r>
+            <a:pPr indent="0" marL="0">
+              <a:buNone/>
+            </a:pPr>
+            <a:r>
+              <a:rPr lang="en-US" sz="1100" dirty="0">
+                <a:solidFill>
+                  <a:srgbClr val="075985"/>
+                </a:solidFill>
+                <a:latin typeface="Calibri" pitchFamily="34" charset="0"/>
+                <a:ea typeface="Calibri" pitchFamily="34" charset="-122"/>
+                <a:cs typeface="Calibri" pitchFamily="34" charset="-120"/>
+              </a:rPr>
+              <a:t> · gli array in memoria</a:t>
+            </a:r>
+            <a:endParaRPr lang="en-US" sz="1100" dirty="0"/>
+          </a:p>
+        </p:txBody>
+      </p:sp>
+      <p:sp>
+        <p:nvSpPr>
           <p:cNvPr id="25" name="Slide Number Placeholder 0"/>
           <p:cNvSpPr>
             <a:spLocks noGrp="1"/>
@@ -19790,6 +21706,133 @@
       </p:sp>
       <p:sp>
         <p:nvSpPr>
+          <p:cNvPr id="17" name="Shape 15"/>
+          <p:cNvSpPr/>
+          <p:nvPr/>
+        </p:nvSpPr>
+        <p:spPr>
+          <a:xfrm>
+            <a:off x="7920304" y="91440"/>
+            <a:ext cx="3722751" cy="274320"/>
+          </a:xfrm>
+          <a:prstGeom prst="rect">
+            <a:avLst/>
+          </a:prstGeom>
+          <a:solidFill>
+            <a:srgbClr val="E0F2FE"/>
+          </a:solidFill>
+          <a:ln w="12700">
+            <a:solidFill>
+              <a:srgbClr val="0369A1"/>
+            </a:solidFill>
+            <a:prstDash val="solid"/>
+          </a:ln>
+        </p:spPr>
+      </p:sp>
+      <p:sp>
+        <p:nvSpPr>
+          <p:cNvPr id="18" name="Shape 16"/>
+          <p:cNvSpPr/>
+          <p:nvPr/>
+        </p:nvSpPr>
+        <p:spPr>
+          <a:xfrm>
+            <a:off x="7920304" y="91440"/>
+            <a:ext cx="73152" cy="274320"/>
+          </a:xfrm>
+          <a:prstGeom prst="rect">
+            <a:avLst/>
+          </a:prstGeom>
+          <a:solidFill>
+            <a:srgbClr val="0369A1"/>
+          </a:solidFill>
+          <a:ln w="12700">
+            <a:solidFill>
+              <a:srgbClr val="0369A1"/>
+            </a:solidFill>
+            <a:prstDash val="solid"/>
+          </a:ln>
+        </p:spPr>
+      </p:sp>
+      <p:pic>
+        <p:nvPicPr>
+          <p:cNvPr id="19" name="Image 0" descr="preencoded.png">    </p:cNvPr>
+          <p:cNvPicPr>
+            <a:picLocks noChangeAspect="1"/>
+          </p:cNvPicPr>
+          <p:nvPr/>
+        </p:nvPicPr>
+        <p:blipFill>
+          <a:blip r:embed="rId1"/>
+          <a:stretch>
+            <a:fillRect/>
+          </a:stretch>
+        </p:blipFill>
+        <p:spPr>
+          <a:xfrm>
+            <a:off x="8048320" y="128016"/>
+            <a:ext cx="201168" cy="201168"/>
+          </a:xfrm>
+          <a:prstGeom prst="rect">
+            <a:avLst/>
+          </a:prstGeom>
+        </p:spPr>
+      </p:pic>
+      <p:sp>
+        <p:nvSpPr>
+          <p:cNvPr id="20" name="Text 17"/>
+          <p:cNvSpPr txBox="1"/>
+          <p:nvPr/>
+        </p:nvSpPr>
+        <p:spPr>
+          <a:xfrm>
+            <a:off x="8304352" y="91440"/>
+            <a:ext cx="3302127" cy="274320"/>
+          </a:xfrm>
+          <a:prstGeom prst="rect">
+            <a:avLst/>
+          </a:prstGeom>
+          <a:noFill/>
+          <a:ln/>
+        </p:spPr>
+        <p:txBody>
+          <a:bodyPr wrap="square" lIns="0" tIns="0" rIns="0" bIns="0" rtlCol="0" anchor="ctr"/>
+          <a:lstStyle/>
+          <a:p>
+            <a:pPr indent="0" marL="0">
+              <a:buNone/>
+            </a:pPr>
+            <a:r>
+              <a:rPr lang="en-US" sz="1100" b="1" dirty="0">
+                <a:solidFill>
+                  <a:srgbClr val="075985"/>
+                </a:solidFill>
+                <a:latin typeface="Calibri" pitchFamily="34" charset="0"/>
+                <a:ea typeface="Calibri" pitchFamily="34" charset="-122"/>
+                <a:cs typeface="Calibri" pitchFamily="34" charset="-120"/>
+              </a:rPr>
+              <a:t>DA COMPRENDERE OGGI</a:t>
+            </a:r>
+            <a:pPr indent="0" marL="0">
+              <a:buNone/>
+            </a:pPr>
+            <a:r>
+              <a:rPr lang="en-US" sz="1100" dirty="0">
+                <a:solidFill>
+                  <a:srgbClr val="075985"/>
+                </a:solidFill>
+                <a:latin typeface="Calibri" pitchFamily="34" charset="0"/>
+                <a:ea typeface="Calibri" pitchFamily="34" charset="-122"/>
+                <a:cs typeface="Calibri" pitchFamily="34" charset="-120"/>
+              </a:rPr>
+              <a:t> · gli array in memoria</a:t>
+            </a:r>
+            <a:endParaRPr lang="en-US" sz="1100" dirty="0"/>
+          </a:p>
+        </p:txBody>
+      </p:sp>
+      <p:sp>
+        <p:nvSpPr>
           <p:cNvPr id="25" name="Slide Number Placeholder 0"/>
           <p:cNvSpPr>
             <a:spLocks noGrp="1"/>
@@ -20889,6 +22932,133 @@
       </p:sp>
       <p:sp>
         <p:nvSpPr>
+          <p:cNvPr id="17" name="Shape 15"/>
+          <p:cNvSpPr/>
+          <p:nvPr/>
+        </p:nvSpPr>
+        <p:spPr>
+          <a:xfrm>
+            <a:off x="7920304" y="91440"/>
+            <a:ext cx="3722751" cy="274320"/>
+          </a:xfrm>
+          <a:prstGeom prst="rect">
+            <a:avLst/>
+          </a:prstGeom>
+          <a:solidFill>
+            <a:srgbClr val="E0F2FE"/>
+          </a:solidFill>
+          <a:ln w="12700">
+            <a:solidFill>
+              <a:srgbClr val="0369A1"/>
+            </a:solidFill>
+            <a:prstDash val="solid"/>
+          </a:ln>
+        </p:spPr>
+      </p:sp>
+      <p:sp>
+        <p:nvSpPr>
+          <p:cNvPr id="18" name="Shape 16"/>
+          <p:cNvSpPr/>
+          <p:nvPr/>
+        </p:nvSpPr>
+        <p:spPr>
+          <a:xfrm>
+            <a:off x="7920304" y="91440"/>
+            <a:ext cx="73152" cy="274320"/>
+          </a:xfrm>
+          <a:prstGeom prst="rect">
+            <a:avLst/>
+          </a:prstGeom>
+          <a:solidFill>
+            <a:srgbClr val="0369A1"/>
+          </a:solidFill>
+          <a:ln w="12700">
+            <a:solidFill>
+              <a:srgbClr val="0369A1"/>
+            </a:solidFill>
+            <a:prstDash val="solid"/>
+          </a:ln>
+        </p:spPr>
+      </p:sp>
+      <p:pic>
+        <p:nvPicPr>
+          <p:cNvPr id="19" name="Image 0" descr="preencoded.png">    </p:cNvPr>
+          <p:cNvPicPr>
+            <a:picLocks noChangeAspect="1"/>
+          </p:cNvPicPr>
+          <p:nvPr/>
+        </p:nvPicPr>
+        <p:blipFill>
+          <a:blip r:embed="rId1"/>
+          <a:stretch>
+            <a:fillRect/>
+          </a:stretch>
+        </p:blipFill>
+        <p:spPr>
+          <a:xfrm>
+            <a:off x="8048320" y="128016"/>
+            <a:ext cx="201168" cy="201168"/>
+          </a:xfrm>
+          <a:prstGeom prst="rect">
+            <a:avLst/>
+          </a:prstGeom>
+        </p:spPr>
+      </p:pic>
+      <p:sp>
+        <p:nvSpPr>
+          <p:cNvPr id="20" name="Text 17"/>
+          <p:cNvSpPr txBox="1"/>
+          <p:nvPr/>
+        </p:nvSpPr>
+        <p:spPr>
+          <a:xfrm>
+            <a:off x="8304352" y="91440"/>
+            <a:ext cx="3302127" cy="274320"/>
+          </a:xfrm>
+          <a:prstGeom prst="rect">
+            <a:avLst/>
+          </a:prstGeom>
+          <a:noFill/>
+          <a:ln/>
+        </p:spPr>
+        <p:txBody>
+          <a:bodyPr wrap="square" lIns="0" tIns="0" rIns="0" bIns="0" rtlCol="0" anchor="ctr"/>
+          <a:lstStyle/>
+          <a:p>
+            <a:pPr indent="0" marL="0">
+              <a:buNone/>
+            </a:pPr>
+            <a:r>
+              <a:rPr lang="en-US" sz="1100" b="1" dirty="0">
+                <a:solidFill>
+                  <a:srgbClr val="075985"/>
+                </a:solidFill>
+                <a:latin typeface="Calibri" pitchFamily="34" charset="0"/>
+                <a:ea typeface="Calibri" pitchFamily="34" charset="-122"/>
+                <a:cs typeface="Calibri" pitchFamily="34" charset="-120"/>
+              </a:rPr>
+              <a:t>DA COMPRENDERE OGGI</a:t>
+            </a:r>
+            <a:pPr indent="0" marL="0">
+              <a:buNone/>
+            </a:pPr>
+            <a:r>
+              <a:rPr lang="en-US" sz="1100" dirty="0">
+                <a:solidFill>
+                  <a:srgbClr val="075985"/>
+                </a:solidFill>
+                <a:latin typeface="Calibri" pitchFamily="34" charset="0"/>
+                <a:ea typeface="Calibri" pitchFamily="34" charset="-122"/>
+                <a:cs typeface="Calibri" pitchFamily="34" charset="-120"/>
+              </a:rPr>
+              <a:t> · gli array in memoria</a:t>
+            </a:r>
+            <a:endParaRPr lang="en-US" sz="1100" dirty="0"/>
+          </a:p>
+        </p:txBody>
+      </p:sp>
+      <p:sp>
+        <p:nvSpPr>
           <p:cNvPr id="25" name="Slide Number Placeholder 0"/>
           <p:cNvSpPr>
             <a:spLocks noGrp="1"/>
@@ -21875,6 +24045,172 @@
       </p:sp>
       <p:sp>
         <p:nvSpPr>
+          <p:cNvPr id="14" name="Shape 12"/>
+          <p:cNvSpPr/>
+          <p:nvPr/>
+        </p:nvSpPr>
+        <p:spPr>
+          <a:xfrm>
+            <a:off x="6650431" y="91440"/>
+            <a:ext cx="4992624" cy="274320"/>
+          </a:xfrm>
+          <a:prstGeom prst="rect">
+            <a:avLst/>
+          </a:prstGeom>
+          <a:solidFill>
+            <a:srgbClr val="FEF3C7"/>
+          </a:solidFill>
+          <a:ln w="12700">
+            <a:solidFill>
+              <a:srgbClr val="B45309"/>
+            </a:solidFill>
+            <a:prstDash val="solid"/>
+          </a:ln>
+        </p:spPr>
+      </p:sp>
+      <p:sp>
+        <p:nvSpPr>
+          <p:cNvPr id="15" name="Shape 13"/>
+          <p:cNvSpPr/>
+          <p:nvPr/>
+        </p:nvSpPr>
+        <p:spPr>
+          <a:xfrm>
+            <a:off x="6650431" y="91440"/>
+            <a:ext cx="27432" cy="274320"/>
+          </a:xfrm>
+          <a:prstGeom prst="rect">
+            <a:avLst/>
+          </a:prstGeom>
+          <a:solidFill>
+            <a:srgbClr val="B45309"/>
+          </a:solidFill>
+          <a:ln w="12700">
+            <a:solidFill>
+              <a:srgbClr val="B45309"/>
+            </a:solidFill>
+            <a:prstDash val="solid"/>
+          </a:ln>
+        </p:spPr>
+      </p:sp>
+      <p:sp>
+        <p:nvSpPr>
+          <p:cNvPr id="16" name="Shape 14"/>
+          <p:cNvSpPr/>
+          <p:nvPr/>
+        </p:nvSpPr>
+        <p:spPr>
+          <a:xfrm>
+            <a:off x="6705295" y="91440"/>
+            <a:ext cx="27432" cy="274320"/>
+          </a:xfrm>
+          <a:prstGeom prst="rect">
+            <a:avLst/>
+          </a:prstGeom>
+          <a:solidFill>
+            <a:srgbClr val="B45309"/>
+          </a:solidFill>
+          <a:ln w="12700">
+            <a:solidFill>
+              <a:srgbClr val="B45309"/>
+            </a:solidFill>
+            <a:prstDash val="solid"/>
+          </a:ln>
+        </p:spPr>
+      </p:sp>
+      <p:pic>
+        <p:nvPicPr>
+          <p:cNvPr id="17" name="Image 0" descr="preencoded.png">    </p:cNvPr>
+          <p:cNvPicPr>
+            <a:picLocks noChangeAspect="1"/>
+          </p:cNvPicPr>
+          <p:nvPr/>
+        </p:nvPicPr>
+        <p:blipFill>
+          <a:blip r:embed="rId1"/>
+          <a:stretch>
+            <a:fillRect/>
+          </a:stretch>
+        </p:blipFill>
+        <p:spPr>
+          <a:xfrm>
+            <a:off x="6778447" y="128016"/>
+            <a:ext cx="201168" cy="201168"/>
+          </a:xfrm>
+          <a:prstGeom prst="rect">
+            <a:avLst/>
+          </a:prstGeom>
+        </p:spPr>
+      </p:pic>
+      <p:sp>
+        <p:nvSpPr>
+          <p:cNvPr id="18" name="Text 15"/>
+          <p:cNvSpPr txBox="1"/>
+          <p:nvPr/>
+        </p:nvSpPr>
+        <p:spPr>
+          <a:xfrm>
+            <a:off x="7034479" y="91440"/>
+            <a:ext cx="4572000" cy="274320"/>
+          </a:xfrm>
+          <a:prstGeom prst="rect">
+            <a:avLst/>
+          </a:prstGeom>
+          <a:noFill/>
+          <a:ln/>
+        </p:spPr>
+        <p:txBody>
+          <a:bodyPr wrap="square" lIns="0" tIns="0" rIns="0" bIns="0" rtlCol="0" anchor="ctr"/>
+          <a:lstStyle/>
+          <a:p>
+            <a:pPr indent="0" marL="0">
+              <a:buNone/>
+            </a:pPr>
+            <a:r>
+              <a:rPr lang="en-US" sz="1100" b="1" dirty="0">
+                <a:solidFill>
+                  <a:srgbClr val="92400E"/>
+                </a:solidFill>
+                <a:latin typeface="Calibri" pitchFamily="34" charset="0"/>
+                <a:ea typeface="Calibri" pitchFamily="34" charset="-122"/>
+                <a:cs typeface="Calibri" pitchFamily="34" charset="-120"/>
+              </a:rPr>
+              <a:t>DA UTILIZZARE OGGI</a:t>
+            </a:r>
+            <a:pPr indent="0" marL="0">
+              <a:buNone/>
+            </a:pPr>
+            <a:r>
+              <a:rPr lang="en-US" sz="1100" dirty="0">
+                <a:solidFill>
+                  <a:srgbClr val="92400E"/>
+                </a:solidFill>
+                <a:latin typeface="Calibri" pitchFamily="34" charset="0"/>
+                <a:ea typeface="Calibri" pitchFamily="34" charset="-122"/>
+                <a:cs typeface="Calibri" pitchFamily="34" charset="-120"/>
+              </a:rPr>
+              <a:t> · la convenzione di chiamata</a:t>
+            </a:r>
+            <a:pPr indent="0" marL="0">
+              <a:buNone/>
+            </a:pPr>
+            <a:r>
+              <a:rPr lang="en-US" sz="1100" b="1" dirty="0">
+                <a:solidFill>
+                  <a:srgbClr val="92400E"/>
+                </a:solidFill>
+                <a:latin typeface="Calibri" pitchFamily="34" charset="0"/>
+                <a:ea typeface="Calibri" pitchFamily="34" charset="-122"/>
+                <a:cs typeface="Calibri" pitchFamily="34" charset="-120"/>
+              </a:rPr>
+              <a:t> → Lezione 18</a:t>
+            </a:r>
+            <a:endParaRPr lang="en-US" sz="1100" dirty="0"/>
+          </a:p>
+        </p:txBody>
+      </p:sp>
+      <p:sp>
+        <p:nvSpPr>
           <p:cNvPr id="25" name="Slide Number Placeholder 0"/>
           <p:cNvSpPr>
             <a:spLocks noGrp="1"/>
@@ -22839,6 +25175,158 @@
       </p:sp>
       <p:sp>
         <p:nvSpPr>
+          <p:cNvPr id="5" name="Shape 3"/>
+          <p:cNvSpPr/>
+          <p:nvPr/>
+        </p:nvSpPr>
+        <p:spPr>
+          <a:xfrm>
+            <a:off x="7875600" y="91440"/>
+            <a:ext cx="3767455" cy="274320"/>
+          </a:xfrm>
+          <a:prstGeom prst="rect">
+            <a:avLst/>
+          </a:prstGeom>
+          <a:solidFill>
+            <a:srgbClr val="FEF3C7"/>
+          </a:solidFill>
+          <a:ln w="12700">
+            <a:solidFill>
+              <a:srgbClr val="B45309"/>
+            </a:solidFill>
+            <a:prstDash val="solid"/>
+          </a:ln>
+        </p:spPr>
+      </p:sp>
+      <p:sp>
+        <p:nvSpPr>
+          <p:cNvPr id="6" name="Shape 4"/>
+          <p:cNvSpPr/>
+          <p:nvPr/>
+        </p:nvSpPr>
+        <p:spPr>
+          <a:xfrm>
+            <a:off x="7875600" y="91440"/>
+            <a:ext cx="27432" cy="274320"/>
+          </a:xfrm>
+          <a:prstGeom prst="rect">
+            <a:avLst/>
+          </a:prstGeom>
+          <a:solidFill>
+            <a:srgbClr val="B45309"/>
+          </a:solidFill>
+          <a:ln w="12700">
+            <a:solidFill>
+              <a:srgbClr val="B45309"/>
+            </a:solidFill>
+            <a:prstDash val="solid"/>
+          </a:ln>
+        </p:spPr>
+      </p:sp>
+      <p:sp>
+        <p:nvSpPr>
+          <p:cNvPr id="7" name="Shape 5"/>
+          <p:cNvSpPr/>
+          <p:nvPr/>
+        </p:nvSpPr>
+        <p:spPr>
+          <a:xfrm>
+            <a:off x="7930464" y="91440"/>
+            <a:ext cx="27432" cy="274320"/>
+          </a:xfrm>
+          <a:prstGeom prst="rect">
+            <a:avLst/>
+          </a:prstGeom>
+          <a:solidFill>
+            <a:srgbClr val="B45309"/>
+          </a:solidFill>
+          <a:ln w="12700">
+            <a:solidFill>
+              <a:srgbClr val="B45309"/>
+            </a:solidFill>
+            <a:prstDash val="solid"/>
+          </a:ln>
+        </p:spPr>
+      </p:sp>
+      <p:pic>
+        <p:nvPicPr>
+          <p:cNvPr id="8" name="Image 0" descr="preencoded.png">    </p:cNvPr>
+          <p:cNvPicPr>
+            <a:picLocks noChangeAspect="1"/>
+          </p:cNvPicPr>
+          <p:nvPr/>
+        </p:nvPicPr>
+        <p:blipFill>
+          <a:blip r:embed="rId1"/>
+          <a:stretch>
+            <a:fillRect/>
+          </a:stretch>
+        </p:blipFill>
+        <p:spPr>
+          <a:xfrm>
+            <a:off x="8003616" y="128016"/>
+            <a:ext cx="201168" cy="201168"/>
+          </a:xfrm>
+          <a:prstGeom prst="rect">
+            <a:avLst/>
+          </a:prstGeom>
+        </p:spPr>
+      </p:pic>
+      <p:sp>
+        <p:nvSpPr>
+          <p:cNvPr id="9" name="Text 6"/>
+          <p:cNvSpPr txBox="1"/>
+          <p:nvPr/>
+        </p:nvSpPr>
+        <p:spPr>
+          <a:xfrm>
+            <a:off x="8259648" y="91440"/>
+            <a:ext cx="3346831" cy="274320"/>
+          </a:xfrm>
+          <a:prstGeom prst="rect">
+            <a:avLst/>
+          </a:prstGeom>
+          <a:noFill/>
+          <a:ln/>
+        </p:spPr>
+        <p:txBody>
+          <a:bodyPr wrap="square" lIns="0" tIns="0" rIns="0" bIns="0" rtlCol="0" anchor="ctr"/>
+          <a:lstStyle/>
+          <a:p>
+            <a:pPr indent="0" marL="0">
+              <a:buNone/>
+            </a:pPr>
+            <a:r>
+              <a:rPr lang="en-US" sz="1100" b="1" dirty="0">
+                <a:solidFill>
+                  <a:srgbClr val="92400E"/>
+                </a:solidFill>
+                <a:latin typeface="Calibri" pitchFamily="34" charset="0"/>
+                <a:ea typeface="Calibri" pitchFamily="34" charset="-122"/>
+                <a:cs typeface="Calibri" pitchFamily="34" charset="-120"/>
+              </a:rPr>
+              <a:t>DA UTILIZZARE OGGI</a:t>
+            </a:r>
+            <a:pPr indent="0" marL="0">
+              <a:buNone/>
+            </a:pPr>
+            <a:r>
+              <a:rPr lang="en-US" sz="1100" dirty="0">
+                <a:solidFill>
+                  <a:srgbClr val="92400E"/>
+                </a:solidFill>
+                <a:latin typeface="Calibri" pitchFamily="34" charset="0"/>
+                <a:ea typeface="Calibri" pitchFamily="34" charset="-122"/>
+                <a:cs typeface="Calibri" pitchFamily="34" charset="-120"/>
+              </a:rPr>
+              <a:t> · gli strumenti di PRG32</a:t>
+            </a:r>
+            <a:endParaRPr lang="en-US" sz="1100" dirty="0"/>
+          </a:p>
+        </p:txBody>
+      </p:sp>
+      <p:sp>
+        <p:nvSpPr>
           <p:cNvPr id="25" name="Slide Number Placeholder 0"/>
           <p:cNvSpPr>
             <a:spLocks noGrp="1"/>
@@ -25095,6 +27583,158 @@
       </p:sp>
       <p:sp>
         <p:nvSpPr>
+          <p:cNvPr id="17" name="Shape 15"/>
+          <p:cNvSpPr/>
+          <p:nvPr/>
+        </p:nvSpPr>
+        <p:spPr>
+          <a:xfrm>
+            <a:off x="7875600" y="91440"/>
+            <a:ext cx="3767455" cy="274320"/>
+          </a:xfrm>
+          <a:prstGeom prst="rect">
+            <a:avLst/>
+          </a:prstGeom>
+          <a:solidFill>
+            <a:srgbClr val="FEF3C7"/>
+          </a:solidFill>
+          <a:ln w="12700">
+            <a:solidFill>
+              <a:srgbClr val="B45309"/>
+            </a:solidFill>
+            <a:prstDash val="solid"/>
+          </a:ln>
+        </p:spPr>
+      </p:sp>
+      <p:sp>
+        <p:nvSpPr>
+          <p:cNvPr id="18" name="Shape 16"/>
+          <p:cNvSpPr/>
+          <p:nvPr/>
+        </p:nvSpPr>
+        <p:spPr>
+          <a:xfrm>
+            <a:off x="7875600" y="91440"/>
+            <a:ext cx="27432" cy="274320"/>
+          </a:xfrm>
+          <a:prstGeom prst="rect">
+            <a:avLst/>
+          </a:prstGeom>
+          <a:solidFill>
+            <a:srgbClr val="B45309"/>
+          </a:solidFill>
+          <a:ln w="12700">
+            <a:solidFill>
+              <a:srgbClr val="B45309"/>
+            </a:solidFill>
+            <a:prstDash val="solid"/>
+          </a:ln>
+        </p:spPr>
+      </p:sp>
+      <p:sp>
+        <p:nvSpPr>
+          <p:cNvPr id="19" name="Shape 17"/>
+          <p:cNvSpPr/>
+          <p:nvPr/>
+        </p:nvSpPr>
+        <p:spPr>
+          <a:xfrm>
+            <a:off x="7930464" y="91440"/>
+            <a:ext cx="27432" cy="274320"/>
+          </a:xfrm>
+          <a:prstGeom prst="rect">
+            <a:avLst/>
+          </a:prstGeom>
+          <a:solidFill>
+            <a:srgbClr val="B45309"/>
+          </a:solidFill>
+          <a:ln w="12700">
+            <a:solidFill>
+              <a:srgbClr val="B45309"/>
+            </a:solidFill>
+            <a:prstDash val="solid"/>
+          </a:ln>
+        </p:spPr>
+      </p:sp>
+      <p:pic>
+        <p:nvPicPr>
+          <p:cNvPr id="20" name="Image 0" descr="preencoded.png">    </p:cNvPr>
+          <p:cNvPicPr>
+            <a:picLocks noChangeAspect="1"/>
+          </p:cNvPicPr>
+          <p:nvPr/>
+        </p:nvPicPr>
+        <p:blipFill>
+          <a:blip r:embed="rId1"/>
+          <a:stretch>
+            <a:fillRect/>
+          </a:stretch>
+        </p:blipFill>
+        <p:spPr>
+          <a:xfrm>
+            <a:off x="8003616" y="128016"/>
+            <a:ext cx="201168" cy="201168"/>
+          </a:xfrm>
+          <a:prstGeom prst="rect">
+            <a:avLst/>
+          </a:prstGeom>
+        </p:spPr>
+      </p:pic>
+      <p:sp>
+        <p:nvSpPr>
+          <p:cNvPr id="21" name="Text 18"/>
+          <p:cNvSpPr txBox="1"/>
+          <p:nvPr/>
+        </p:nvSpPr>
+        <p:spPr>
+          <a:xfrm>
+            <a:off x="8259648" y="91440"/>
+            <a:ext cx="3346831" cy="274320"/>
+          </a:xfrm>
+          <a:prstGeom prst="rect">
+            <a:avLst/>
+          </a:prstGeom>
+          <a:noFill/>
+          <a:ln/>
+        </p:spPr>
+        <p:txBody>
+          <a:bodyPr wrap="square" lIns="0" tIns="0" rIns="0" bIns="0" rtlCol="0" anchor="ctr"/>
+          <a:lstStyle/>
+          <a:p>
+            <a:pPr indent="0" marL="0">
+              <a:buNone/>
+            </a:pPr>
+            <a:r>
+              <a:rPr lang="en-US" sz="1100" b="1" dirty="0">
+                <a:solidFill>
+                  <a:srgbClr val="92400E"/>
+                </a:solidFill>
+                <a:latin typeface="Calibri" pitchFamily="34" charset="0"/>
+                <a:ea typeface="Calibri" pitchFamily="34" charset="-122"/>
+                <a:cs typeface="Calibri" pitchFamily="34" charset="-120"/>
+              </a:rPr>
+              <a:t>DA UTILIZZARE OGGI</a:t>
+            </a:r>
+            <a:pPr indent="0" marL="0">
+              <a:buNone/>
+            </a:pPr>
+            <a:r>
+              <a:rPr lang="en-US" sz="1100" dirty="0">
+                <a:solidFill>
+                  <a:srgbClr val="92400E"/>
+                </a:solidFill>
+                <a:latin typeface="Calibri" pitchFamily="34" charset="0"/>
+                <a:ea typeface="Calibri" pitchFamily="34" charset="-122"/>
+                <a:cs typeface="Calibri" pitchFamily="34" charset="-120"/>
+              </a:rPr>
+              <a:t> · gli strumenti di PRG32</a:t>
+            </a:r>
+            <a:endParaRPr lang="en-US" sz="1100" dirty="0"/>
+          </a:p>
+        </p:txBody>
+      </p:sp>
+      <p:sp>
+        <p:nvSpPr>
           <p:cNvPr id="25" name="Slide Number Placeholder 0"/>
           <p:cNvSpPr>
             <a:spLocks noGrp="1"/>
@@ -25931,6 +28571,158 @@
       </p:sp>
       <p:sp>
         <p:nvSpPr>
+          <p:cNvPr id="17" name="Shape 15"/>
+          <p:cNvSpPr/>
+          <p:nvPr/>
+        </p:nvSpPr>
+        <p:spPr>
+          <a:xfrm>
+            <a:off x="7875600" y="91440"/>
+            <a:ext cx="3767455" cy="274320"/>
+          </a:xfrm>
+          <a:prstGeom prst="rect">
+            <a:avLst/>
+          </a:prstGeom>
+          <a:solidFill>
+            <a:srgbClr val="FEF3C7"/>
+          </a:solidFill>
+          <a:ln w="12700">
+            <a:solidFill>
+              <a:srgbClr val="B45309"/>
+            </a:solidFill>
+            <a:prstDash val="solid"/>
+          </a:ln>
+        </p:spPr>
+      </p:sp>
+      <p:sp>
+        <p:nvSpPr>
+          <p:cNvPr id="18" name="Shape 16"/>
+          <p:cNvSpPr/>
+          <p:nvPr/>
+        </p:nvSpPr>
+        <p:spPr>
+          <a:xfrm>
+            <a:off x="7875600" y="91440"/>
+            <a:ext cx="27432" cy="274320"/>
+          </a:xfrm>
+          <a:prstGeom prst="rect">
+            <a:avLst/>
+          </a:prstGeom>
+          <a:solidFill>
+            <a:srgbClr val="B45309"/>
+          </a:solidFill>
+          <a:ln w="12700">
+            <a:solidFill>
+              <a:srgbClr val="B45309"/>
+            </a:solidFill>
+            <a:prstDash val="solid"/>
+          </a:ln>
+        </p:spPr>
+      </p:sp>
+      <p:sp>
+        <p:nvSpPr>
+          <p:cNvPr id="19" name="Shape 17"/>
+          <p:cNvSpPr/>
+          <p:nvPr/>
+        </p:nvSpPr>
+        <p:spPr>
+          <a:xfrm>
+            <a:off x="7930464" y="91440"/>
+            <a:ext cx="27432" cy="274320"/>
+          </a:xfrm>
+          <a:prstGeom prst="rect">
+            <a:avLst/>
+          </a:prstGeom>
+          <a:solidFill>
+            <a:srgbClr val="B45309"/>
+          </a:solidFill>
+          <a:ln w="12700">
+            <a:solidFill>
+              <a:srgbClr val="B45309"/>
+            </a:solidFill>
+            <a:prstDash val="solid"/>
+          </a:ln>
+        </p:spPr>
+      </p:sp>
+      <p:pic>
+        <p:nvPicPr>
+          <p:cNvPr id="20" name="Image 0" descr="preencoded.png">    </p:cNvPr>
+          <p:cNvPicPr>
+            <a:picLocks noChangeAspect="1"/>
+          </p:cNvPicPr>
+          <p:nvPr/>
+        </p:nvPicPr>
+        <p:blipFill>
+          <a:blip r:embed="rId1"/>
+          <a:stretch>
+            <a:fillRect/>
+          </a:stretch>
+        </p:blipFill>
+        <p:spPr>
+          <a:xfrm>
+            <a:off x="8003616" y="128016"/>
+            <a:ext cx="201168" cy="201168"/>
+          </a:xfrm>
+          <a:prstGeom prst="rect">
+            <a:avLst/>
+          </a:prstGeom>
+        </p:spPr>
+      </p:pic>
+      <p:sp>
+        <p:nvSpPr>
+          <p:cNvPr id="21" name="Text 18"/>
+          <p:cNvSpPr txBox="1"/>
+          <p:nvPr/>
+        </p:nvSpPr>
+        <p:spPr>
+          <a:xfrm>
+            <a:off x="8259648" y="91440"/>
+            <a:ext cx="3346831" cy="274320"/>
+          </a:xfrm>
+          <a:prstGeom prst="rect">
+            <a:avLst/>
+          </a:prstGeom>
+          <a:noFill/>
+          <a:ln/>
+        </p:spPr>
+        <p:txBody>
+          <a:bodyPr wrap="square" lIns="0" tIns="0" rIns="0" bIns="0" rtlCol="0" anchor="ctr"/>
+          <a:lstStyle/>
+          <a:p>
+            <a:pPr indent="0" marL="0">
+              <a:buNone/>
+            </a:pPr>
+            <a:r>
+              <a:rPr lang="en-US" sz="1100" b="1" dirty="0">
+                <a:solidFill>
+                  <a:srgbClr val="92400E"/>
+                </a:solidFill>
+                <a:latin typeface="Calibri" pitchFamily="34" charset="0"/>
+                <a:ea typeface="Calibri" pitchFamily="34" charset="-122"/>
+                <a:cs typeface="Calibri" pitchFamily="34" charset="-120"/>
+              </a:rPr>
+              <a:t>DA UTILIZZARE OGGI</a:t>
+            </a:r>
+            <a:pPr indent="0" marL="0">
+              <a:buNone/>
+            </a:pPr>
+            <a:r>
+              <a:rPr lang="en-US" sz="1100" dirty="0">
+                <a:solidFill>
+                  <a:srgbClr val="92400E"/>
+                </a:solidFill>
+                <a:latin typeface="Calibri" pitchFamily="34" charset="0"/>
+                <a:ea typeface="Calibri" pitchFamily="34" charset="-122"/>
+                <a:cs typeface="Calibri" pitchFamily="34" charset="-120"/>
+              </a:rPr>
+              <a:t> · gli strumenti di PRG32</a:t>
+            </a:r>
+            <a:endParaRPr lang="en-US" sz="1100" dirty="0"/>
+          </a:p>
+        </p:txBody>
+      </p:sp>
+      <p:sp>
+        <p:nvSpPr>
           <p:cNvPr id="25" name="Slide Number Placeholder 0"/>
           <p:cNvSpPr>
             <a:spLocks noGrp="1"/>
@@ -26760,6 +29552,158 @@
                 <a:cs typeface="Calibri" pitchFamily="34" charset="-120"/>
               </a:rPr>
               <a:t>Schermo nero: confrontate il cablaggio del display con il firmware</a:t>
+            </a:r>
+            <a:endParaRPr lang="en-US" sz="1100" dirty="0"/>
+          </a:p>
+        </p:txBody>
+      </p:sp>
+      <p:sp>
+        <p:nvSpPr>
+          <p:cNvPr id="17" name="Shape 15"/>
+          <p:cNvSpPr/>
+          <p:nvPr/>
+        </p:nvSpPr>
+        <p:spPr>
+          <a:xfrm>
+            <a:off x="7875600" y="91440"/>
+            <a:ext cx="3767455" cy="274320"/>
+          </a:xfrm>
+          <a:prstGeom prst="rect">
+            <a:avLst/>
+          </a:prstGeom>
+          <a:solidFill>
+            <a:srgbClr val="FEF3C7"/>
+          </a:solidFill>
+          <a:ln w="12700">
+            <a:solidFill>
+              <a:srgbClr val="B45309"/>
+            </a:solidFill>
+            <a:prstDash val="solid"/>
+          </a:ln>
+        </p:spPr>
+      </p:sp>
+      <p:sp>
+        <p:nvSpPr>
+          <p:cNvPr id="18" name="Shape 16"/>
+          <p:cNvSpPr/>
+          <p:nvPr/>
+        </p:nvSpPr>
+        <p:spPr>
+          <a:xfrm>
+            <a:off x="7875600" y="91440"/>
+            <a:ext cx="27432" cy="274320"/>
+          </a:xfrm>
+          <a:prstGeom prst="rect">
+            <a:avLst/>
+          </a:prstGeom>
+          <a:solidFill>
+            <a:srgbClr val="B45309"/>
+          </a:solidFill>
+          <a:ln w="12700">
+            <a:solidFill>
+              <a:srgbClr val="B45309"/>
+            </a:solidFill>
+            <a:prstDash val="solid"/>
+          </a:ln>
+        </p:spPr>
+      </p:sp>
+      <p:sp>
+        <p:nvSpPr>
+          <p:cNvPr id="19" name="Shape 17"/>
+          <p:cNvSpPr/>
+          <p:nvPr/>
+        </p:nvSpPr>
+        <p:spPr>
+          <a:xfrm>
+            <a:off x="7930464" y="91440"/>
+            <a:ext cx="27432" cy="274320"/>
+          </a:xfrm>
+          <a:prstGeom prst="rect">
+            <a:avLst/>
+          </a:prstGeom>
+          <a:solidFill>
+            <a:srgbClr val="B45309"/>
+          </a:solidFill>
+          <a:ln w="12700">
+            <a:solidFill>
+              <a:srgbClr val="B45309"/>
+            </a:solidFill>
+            <a:prstDash val="solid"/>
+          </a:ln>
+        </p:spPr>
+      </p:sp>
+      <p:pic>
+        <p:nvPicPr>
+          <p:cNvPr id="20" name="Image 0" descr="preencoded.png">    </p:cNvPr>
+          <p:cNvPicPr>
+            <a:picLocks noChangeAspect="1"/>
+          </p:cNvPicPr>
+          <p:nvPr/>
+        </p:nvPicPr>
+        <p:blipFill>
+          <a:blip r:embed="rId1"/>
+          <a:stretch>
+            <a:fillRect/>
+          </a:stretch>
+        </p:blipFill>
+        <p:spPr>
+          <a:xfrm>
+            <a:off x="8003616" y="128016"/>
+            <a:ext cx="201168" cy="201168"/>
+          </a:xfrm>
+          <a:prstGeom prst="rect">
+            <a:avLst/>
+          </a:prstGeom>
+        </p:spPr>
+      </p:pic>
+      <p:sp>
+        <p:nvSpPr>
+          <p:cNvPr id="21" name="Text 18"/>
+          <p:cNvSpPr txBox="1"/>
+          <p:nvPr/>
+        </p:nvSpPr>
+        <p:spPr>
+          <a:xfrm>
+            <a:off x="8259648" y="91440"/>
+            <a:ext cx="3346831" cy="274320"/>
+          </a:xfrm>
+          <a:prstGeom prst="rect">
+            <a:avLst/>
+          </a:prstGeom>
+          <a:noFill/>
+          <a:ln/>
+        </p:spPr>
+        <p:txBody>
+          <a:bodyPr wrap="square" lIns="0" tIns="0" rIns="0" bIns="0" rtlCol="0" anchor="ctr"/>
+          <a:lstStyle/>
+          <a:p>
+            <a:pPr indent="0" marL="0">
+              <a:buNone/>
+            </a:pPr>
+            <a:r>
+              <a:rPr lang="en-US" sz="1100" b="1" dirty="0">
+                <a:solidFill>
+                  <a:srgbClr val="92400E"/>
+                </a:solidFill>
+                <a:latin typeface="Calibri" pitchFamily="34" charset="0"/>
+                <a:ea typeface="Calibri" pitchFamily="34" charset="-122"/>
+                <a:cs typeface="Calibri" pitchFamily="34" charset="-120"/>
+              </a:rPr>
+              <a:t>DA UTILIZZARE OGGI</a:t>
+            </a:r>
+            <a:pPr indent="0" marL="0">
+              <a:buNone/>
+            </a:pPr>
+            <a:r>
+              <a:rPr lang="en-US" sz="1100" dirty="0">
+                <a:solidFill>
+                  <a:srgbClr val="92400E"/>
+                </a:solidFill>
+                <a:latin typeface="Calibri" pitchFamily="34" charset="0"/>
+                <a:ea typeface="Calibri" pitchFamily="34" charset="-122"/>
+                <a:cs typeface="Calibri" pitchFamily="34" charset="-120"/>
+              </a:rPr>
+              <a:t> · gli strumenti di PRG32</a:t>
             </a:r>
             <a:endParaRPr lang="en-US" sz="1100" dirty="0"/>
           </a:p>
@@ -28148,6 +31092,158 @@
       </p:graphicFrame>
       <p:sp>
         <p:nvSpPr>
+          <p:cNvPr id="4" name="Shape 1"/>
+          <p:cNvSpPr/>
+          <p:nvPr/>
+        </p:nvSpPr>
+        <p:spPr>
+          <a:xfrm>
+            <a:off x="7875600" y="91440"/>
+            <a:ext cx="3767455" cy="274320"/>
+          </a:xfrm>
+          <a:prstGeom prst="rect">
+            <a:avLst/>
+          </a:prstGeom>
+          <a:solidFill>
+            <a:srgbClr val="FEF3C7"/>
+          </a:solidFill>
+          <a:ln w="12700">
+            <a:solidFill>
+              <a:srgbClr val="B45309"/>
+            </a:solidFill>
+            <a:prstDash val="solid"/>
+          </a:ln>
+        </p:spPr>
+      </p:sp>
+      <p:sp>
+        <p:nvSpPr>
+          <p:cNvPr id="5" name="Shape 2"/>
+          <p:cNvSpPr/>
+          <p:nvPr/>
+        </p:nvSpPr>
+        <p:spPr>
+          <a:xfrm>
+            <a:off x="7875600" y="91440"/>
+            <a:ext cx="27432" cy="274320"/>
+          </a:xfrm>
+          <a:prstGeom prst="rect">
+            <a:avLst/>
+          </a:prstGeom>
+          <a:solidFill>
+            <a:srgbClr val="B45309"/>
+          </a:solidFill>
+          <a:ln w="12700">
+            <a:solidFill>
+              <a:srgbClr val="B45309"/>
+            </a:solidFill>
+            <a:prstDash val="solid"/>
+          </a:ln>
+        </p:spPr>
+      </p:sp>
+      <p:sp>
+        <p:nvSpPr>
+          <p:cNvPr id="6" name="Shape 3"/>
+          <p:cNvSpPr/>
+          <p:nvPr/>
+        </p:nvSpPr>
+        <p:spPr>
+          <a:xfrm>
+            <a:off x="7930464" y="91440"/>
+            <a:ext cx="27432" cy="274320"/>
+          </a:xfrm>
+          <a:prstGeom prst="rect">
+            <a:avLst/>
+          </a:prstGeom>
+          <a:solidFill>
+            <a:srgbClr val="B45309"/>
+          </a:solidFill>
+          <a:ln w="12700">
+            <a:solidFill>
+              <a:srgbClr val="B45309"/>
+            </a:solidFill>
+            <a:prstDash val="solid"/>
+          </a:ln>
+        </p:spPr>
+      </p:sp>
+      <p:pic>
+        <p:nvPicPr>
+          <p:cNvPr id="7" name="Image 0" descr="preencoded.png">    </p:cNvPr>
+          <p:cNvPicPr>
+            <a:picLocks noChangeAspect="1"/>
+          </p:cNvPicPr>
+          <p:nvPr/>
+        </p:nvPicPr>
+        <p:blipFill>
+          <a:blip r:embed="rId1"/>
+          <a:stretch>
+            <a:fillRect/>
+          </a:stretch>
+        </p:blipFill>
+        <p:spPr>
+          <a:xfrm>
+            <a:off x="8003616" y="128016"/>
+            <a:ext cx="201168" cy="201168"/>
+          </a:xfrm>
+          <a:prstGeom prst="rect">
+            <a:avLst/>
+          </a:prstGeom>
+        </p:spPr>
+      </p:pic>
+      <p:sp>
+        <p:nvSpPr>
+          <p:cNvPr id="8" name="Text 4"/>
+          <p:cNvSpPr txBox="1"/>
+          <p:nvPr/>
+        </p:nvSpPr>
+        <p:spPr>
+          <a:xfrm>
+            <a:off x="8259648" y="91440"/>
+            <a:ext cx="3346831" cy="274320"/>
+          </a:xfrm>
+          <a:prstGeom prst="rect">
+            <a:avLst/>
+          </a:prstGeom>
+          <a:noFill/>
+          <a:ln/>
+        </p:spPr>
+        <p:txBody>
+          <a:bodyPr wrap="square" lIns="0" tIns="0" rIns="0" bIns="0" rtlCol="0" anchor="ctr"/>
+          <a:lstStyle/>
+          <a:p>
+            <a:pPr indent="0" marL="0">
+              <a:buNone/>
+            </a:pPr>
+            <a:r>
+              <a:rPr lang="en-US" sz="1100" b="1" dirty="0">
+                <a:solidFill>
+                  <a:srgbClr val="92400E"/>
+                </a:solidFill>
+                <a:latin typeface="Calibri" pitchFamily="34" charset="0"/>
+                <a:ea typeface="Calibri" pitchFamily="34" charset="-122"/>
+                <a:cs typeface="Calibri" pitchFamily="34" charset="-120"/>
+              </a:rPr>
+              <a:t>DA UTILIZZARE OGGI</a:t>
+            </a:r>
+            <a:pPr indent="0" marL="0">
+              <a:buNone/>
+            </a:pPr>
+            <a:r>
+              <a:rPr lang="en-US" sz="1100" dirty="0">
+                <a:solidFill>
+                  <a:srgbClr val="92400E"/>
+                </a:solidFill>
+                <a:latin typeface="Calibri" pitchFamily="34" charset="0"/>
+                <a:ea typeface="Calibri" pitchFamily="34" charset="-122"/>
+                <a:cs typeface="Calibri" pitchFamily="34" charset="-120"/>
+              </a:rPr>
+              <a:t> · gli strumenti di PRG32</a:t>
+            </a:r>
+            <a:endParaRPr lang="en-US" sz="1100" dirty="0"/>
+          </a:p>
+        </p:txBody>
+      </p:sp>
+      <p:sp>
+        <p:nvSpPr>
           <p:cNvPr id="25" name="Slide Number Placeholder 0"/>
           <p:cNvSpPr>
             <a:spLocks noGrp="1"/>
@@ -29888,6 +32984,133 @@
       </p:sp>
       <p:sp>
         <p:nvSpPr>
+          <p:cNvPr id="17" name="Shape 15"/>
+          <p:cNvSpPr/>
+          <p:nvPr/>
+        </p:nvSpPr>
+        <p:spPr>
+          <a:xfrm>
+            <a:off x="7723327" y="91440"/>
+            <a:ext cx="3919728" cy="274320"/>
+          </a:xfrm>
+          <a:prstGeom prst="rect">
+            <a:avLst/>
+          </a:prstGeom>
+          <a:solidFill>
+            <a:srgbClr val="E0F2FE"/>
+          </a:solidFill>
+          <a:ln w="12700">
+            <a:solidFill>
+              <a:srgbClr val="0369A1"/>
+            </a:solidFill>
+            <a:prstDash val="solid"/>
+          </a:ln>
+        </p:spPr>
+      </p:sp>
+      <p:sp>
+        <p:nvSpPr>
+          <p:cNvPr id="18" name="Shape 16"/>
+          <p:cNvSpPr/>
+          <p:nvPr/>
+        </p:nvSpPr>
+        <p:spPr>
+          <a:xfrm>
+            <a:off x="7723327" y="91440"/>
+            <a:ext cx="73152" cy="274320"/>
+          </a:xfrm>
+          <a:prstGeom prst="rect">
+            <a:avLst/>
+          </a:prstGeom>
+          <a:solidFill>
+            <a:srgbClr val="0369A1"/>
+          </a:solidFill>
+          <a:ln w="12700">
+            <a:solidFill>
+              <a:srgbClr val="0369A1"/>
+            </a:solidFill>
+            <a:prstDash val="solid"/>
+          </a:ln>
+        </p:spPr>
+      </p:sp>
+      <p:pic>
+        <p:nvPicPr>
+          <p:cNvPr id="19" name="Image 0" descr="preencoded.png">    </p:cNvPr>
+          <p:cNvPicPr>
+            <a:picLocks noChangeAspect="1"/>
+          </p:cNvPicPr>
+          <p:nvPr/>
+        </p:nvPicPr>
+        <p:blipFill>
+          <a:blip r:embed="rId1"/>
+          <a:stretch>
+            <a:fillRect/>
+          </a:stretch>
+        </p:blipFill>
+        <p:spPr>
+          <a:xfrm>
+            <a:off x="7851343" y="128016"/>
+            <a:ext cx="201168" cy="201168"/>
+          </a:xfrm>
+          <a:prstGeom prst="rect">
+            <a:avLst/>
+          </a:prstGeom>
+        </p:spPr>
+      </p:pic>
+      <p:sp>
+        <p:nvSpPr>
+          <p:cNvPr id="20" name="Text 17"/>
+          <p:cNvSpPr txBox="1"/>
+          <p:nvPr/>
+        </p:nvSpPr>
+        <p:spPr>
+          <a:xfrm>
+            <a:off x="8107375" y="91440"/>
+            <a:ext cx="3499104" cy="274320"/>
+          </a:xfrm>
+          <a:prstGeom prst="rect">
+            <a:avLst/>
+          </a:prstGeom>
+          <a:noFill/>
+          <a:ln/>
+        </p:spPr>
+        <p:txBody>
+          <a:bodyPr wrap="square" lIns="0" tIns="0" rIns="0" bIns="0" rtlCol="0" anchor="ctr"/>
+          <a:lstStyle/>
+          <a:p>
+            <a:pPr indent="0" marL="0">
+              <a:buNone/>
+            </a:pPr>
+            <a:r>
+              <a:rPr lang="en-US" sz="1100" b="1" dirty="0">
+                <a:solidFill>
+                  <a:srgbClr val="075985"/>
+                </a:solidFill>
+                <a:latin typeface="Calibri" pitchFamily="34" charset="0"/>
+                <a:ea typeface="Calibri" pitchFamily="34" charset="-122"/>
+                <a:cs typeface="Calibri" pitchFamily="34" charset="-120"/>
+              </a:rPr>
+              <a:t>DA COMPRENDERE OGGI</a:t>
+            </a:r>
+            <a:pPr indent="0" marL="0">
+              <a:buNone/>
+            </a:pPr>
+            <a:r>
+              <a:rPr lang="en-US" sz="1100" dirty="0">
+                <a:solidFill>
+                  <a:srgbClr val="075985"/>
+                </a:solidFill>
+                <a:latin typeface="Calibri" pitchFamily="34" charset="0"/>
+                <a:ea typeface="Calibri" pitchFamily="34" charset="-122"/>
+                <a:cs typeface="Calibri" pitchFamily="34" charset="-120"/>
+              </a:rPr>
+              <a:t> · macchine a stati finiti</a:t>
+            </a:r>
+            <a:endParaRPr lang="en-US" sz="1100" dirty="0"/>
+          </a:p>
+        </p:txBody>
+      </p:sp>
+      <p:sp>
+        <p:nvSpPr>
           <p:cNvPr id="25" name="Slide Number Placeholder 0"/>
           <p:cNvSpPr>
             <a:spLocks noGrp="1"/>
@@ -30520,6 +33743,133 @@
       </p:sp>
       <p:sp>
         <p:nvSpPr>
+          <p:cNvPr id="14" name="Shape 12"/>
+          <p:cNvSpPr/>
+          <p:nvPr/>
+        </p:nvSpPr>
+        <p:spPr>
+          <a:xfrm>
+            <a:off x="7854645" y="91440"/>
+            <a:ext cx="3788410" cy="274320"/>
+          </a:xfrm>
+          <a:prstGeom prst="rect">
+            <a:avLst/>
+          </a:prstGeom>
+          <a:solidFill>
+            <a:srgbClr val="E0F2FE"/>
+          </a:solidFill>
+          <a:ln w="12700">
+            <a:solidFill>
+              <a:srgbClr val="0369A1"/>
+            </a:solidFill>
+            <a:prstDash val="solid"/>
+          </a:ln>
+        </p:spPr>
+      </p:sp>
+      <p:sp>
+        <p:nvSpPr>
+          <p:cNvPr id="15" name="Shape 13"/>
+          <p:cNvSpPr/>
+          <p:nvPr/>
+        </p:nvSpPr>
+        <p:spPr>
+          <a:xfrm>
+            <a:off x="7854645" y="91440"/>
+            <a:ext cx="73152" cy="274320"/>
+          </a:xfrm>
+          <a:prstGeom prst="rect">
+            <a:avLst/>
+          </a:prstGeom>
+          <a:solidFill>
+            <a:srgbClr val="0369A1"/>
+          </a:solidFill>
+          <a:ln w="12700">
+            <a:solidFill>
+              <a:srgbClr val="0369A1"/>
+            </a:solidFill>
+            <a:prstDash val="solid"/>
+          </a:ln>
+        </p:spPr>
+      </p:sp>
+      <p:pic>
+        <p:nvPicPr>
+          <p:cNvPr id="16" name="Image 0" descr="preencoded.png">    </p:cNvPr>
+          <p:cNvPicPr>
+            <a:picLocks noChangeAspect="1"/>
+          </p:cNvPicPr>
+          <p:nvPr/>
+        </p:nvPicPr>
+        <p:blipFill>
+          <a:blip r:embed="rId1"/>
+          <a:stretch>
+            <a:fillRect/>
+          </a:stretch>
+        </p:blipFill>
+        <p:spPr>
+          <a:xfrm>
+            <a:off x="7982661" y="128016"/>
+            <a:ext cx="201168" cy="201168"/>
+          </a:xfrm>
+          <a:prstGeom prst="rect">
+            <a:avLst/>
+          </a:prstGeom>
+        </p:spPr>
+      </p:pic>
+      <p:sp>
+        <p:nvSpPr>
+          <p:cNvPr id="17" name="Text 14"/>
+          <p:cNvSpPr txBox="1"/>
+          <p:nvPr/>
+        </p:nvSpPr>
+        <p:spPr>
+          <a:xfrm>
+            <a:off x="8238693" y="91440"/>
+            <a:ext cx="3367786" cy="274320"/>
+          </a:xfrm>
+          <a:prstGeom prst="rect">
+            <a:avLst/>
+          </a:prstGeom>
+          <a:noFill/>
+          <a:ln/>
+        </p:spPr>
+        <p:txBody>
+          <a:bodyPr wrap="square" lIns="0" tIns="0" rIns="0" bIns="0" rtlCol="0" anchor="ctr"/>
+          <a:lstStyle/>
+          <a:p>
+            <a:pPr indent="0" marL="0">
+              <a:buNone/>
+            </a:pPr>
+            <a:r>
+              <a:rPr lang="en-US" sz="1100" b="1" dirty="0">
+                <a:solidFill>
+                  <a:srgbClr val="075985"/>
+                </a:solidFill>
+                <a:latin typeface="Calibri" pitchFamily="34" charset="0"/>
+                <a:ea typeface="Calibri" pitchFamily="34" charset="-122"/>
+                <a:cs typeface="Calibri" pitchFamily="34" charset="-120"/>
+              </a:rPr>
+              <a:t>DA COMPRENDERE OGGI</a:t>
+            </a:r>
+            <a:pPr indent="0" marL="0">
+              <a:buNone/>
+            </a:pPr>
+            <a:r>
+              <a:rPr lang="en-US" sz="1100" dirty="0">
+                <a:solidFill>
+                  <a:srgbClr val="075985"/>
+                </a:solidFill>
+                <a:latin typeface="Calibri" pitchFamily="34" charset="0"/>
+                <a:ea typeface="Calibri" pitchFamily="34" charset="-122"/>
+                <a:cs typeface="Calibri" pitchFamily="34" charset="-120"/>
+              </a:rPr>
+              <a:t> · .text, .rodata, .data</a:t>
+            </a:r>
+            <a:endParaRPr lang="en-US" sz="1100" dirty="0"/>
+          </a:p>
+        </p:txBody>
+      </p:sp>
+      <p:sp>
+        <p:nvSpPr>
           <p:cNvPr id="25" name="Slide Number Placeholder 0"/>
           <p:cNvSpPr>
             <a:spLocks noGrp="1"/>
@@ -31488,6 +34838,133 @@
       </p:sp>
       <p:sp>
         <p:nvSpPr>
+          <p:cNvPr id="17" name="Shape 15"/>
+          <p:cNvSpPr/>
+          <p:nvPr/>
+        </p:nvSpPr>
+        <p:spPr>
+          <a:xfrm>
+            <a:off x="7854645" y="91440"/>
+            <a:ext cx="3788410" cy="274320"/>
+          </a:xfrm>
+          <a:prstGeom prst="rect">
+            <a:avLst/>
+          </a:prstGeom>
+          <a:solidFill>
+            <a:srgbClr val="E0F2FE"/>
+          </a:solidFill>
+          <a:ln w="12700">
+            <a:solidFill>
+              <a:srgbClr val="0369A1"/>
+            </a:solidFill>
+            <a:prstDash val="solid"/>
+          </a:ln>
+        </p:spPr>
+      </p:sp>
+      <p:sp>
+        <p:nvSpPr>
+          <p:cNvPr id="18" name="Shape 16"/>
+          <p:cNvSpPr/>
+          <p:nvPr/>
+        </p:nvSpPr>
+        <p:spPr>
+          <a:xfrm>
+            <a:off x="7854645" y="91440"/>
+            <a:ext cx="73152" cy="274320"/>
+          </a:xfrm>
+          <a:prstGeom prst="rect">
+            <a:avLst/>
+          </a:prstGeom>
+          <a:solidFill>
+            <a:srgbClr val="0369A1"/>
+          </a:solidFill>
+          <a:ln w="12700">
+            <a:solidFill>
+              <a:srgbClr val="0369A1"/>
+            </a:solidFill>
+            <a:prstDash val="solid"/>
+          </a:ln>
+        </p:spPr>
+      </p:sp>
+      <p:pic>
+        <p:nvPicPr>
+          <p:cNvPr id="19" name="Image 0" descr="preencoded.png">    </p:cNvPr>
+          <p:cNvPicPr>
+            <a:picLocks noChangeAspect="1"/>
+          </p:cNvPicPr>
+          <p:nvPr/>
+        </p:nvPicPr>
+        <p:blipFill>
+          <a:blip r:embed="rId1"/>
+          <a:stretch>
+            <a:fillRect/>
+          </a:stretch>
+        </p:blipFill>
+        <p:spPr>
+          <a:xfrm>
+            <a:off x="7982661" y="128016"/>
+            <a:ext cx="201168" cy="201168"/>
+          </a:xfrm>
+          <a:prstGeom prst="rect">
+            <a:avLst/>
+          </a:prstGeom>
+        </p:spPr>
+      </p:pic>
+      <p:sp>
+        <p:nvSpPr>
+          <p:cNvPr id="20" name="Text 17"/>
+          <p:cNvSpPr txBox="1"/>
+          <p:nvPr/>
+        </p:nvSpPr>
+        <p:spPr>
+          <a:xfrm>
+            <a:off x="8238693" y="91440"/>
+            <a:ext cx="3367786" cy="274320"/>
+          </a:xfrm>
+          <a:prstGeom prst="rect">
+            <a:avLst/>
+          </a:prstGeom>
+          <a:noFill/>
+          <a:ln/>
+        </p:spPr>
+        <p:txBody>
+          <a:bodyPr wrap="square" lIns="0" tIns="0" rIns="0" bIns="0" rtlCol="0" anchor="ctr"/>
+          <a:lstStyle/>
+          <a:p>
+            <a:pPr indent="0" marL="0">
+              <a:buNone/>
+            </a:pPr>
+            <a:r>
+              <a:rPr lang="en-US" sz="1100" b="1" dirty="0">
+                <a:solidFill>
+                  <a:srgbClr val="075985"/>
+                </a:solidFill>
+                <a:latin typeface="Calibri" pitchFamily="34" charset="0"/>
+                <a:ea typeface="Calibri" pitchFamily="34" charset="-122"/>
+                <a:cs typeface="Calibri" pitchFamily="34" charset="-120"/>
+              </a:rPr>
+              <a:t>DA COMPRENDERE OGGI</a:t>
+            </a:r>
+            <a:pPr indent="0" marL="0">
+              <a:buNone/>
+            </a:pPr>
+            <a:r>
+              <a:rPr lang="en-US" sz="1100" dirty="0">
+                <a:solidFill>
+                  <a:srgbClr val="075985"/>
+                </a:solidFill>
+                <a:latin typeface="Calibri" pitchFamily="34" charset="0"/>
+                <a:ea typeface="Calibri" pitchFamily="34" charset="-122"/>
+                <a:cs typeface="Calibri" pitchFamily="34" charset="-120"/>
+              </a:rPr>
+              <a:t> · .text, .rodata, .data</a:t>
+            </a:r>
+            <a:endParaRPr lang="en-US" sz="1100" dirty="0"/>
+          </a:p>
+        </p:txBody>
+      </p:sp>
+      <p:sp>
+        <p:nvSpPr>
           <p:cNvPr id="25" name="Slide Number Placeholder 0"/>
           <p:cNvSpPr>
             <a:spLocks noGrp="1"/>
@@ -32191,6 +35668,133 @@
       </p:sp>
       <p:sp>
         <p:nvSpPr>
+          <p:cNvPr id="14" name="Shape 12"/>
+          <p:cNvSpPr/>
+          <p:nvPr/>
+        </p:nvSpPr>
+        <p:spPr>
+          <a:xfrm>
+            <a:off x="7723327" y="91440"/>
+            <a:ext cx="3919728" cy="274320"/>
+          </a:xfrm>
+          <a:prstGeom prst="rect">
+            <a:avLst/>
+          </a:prstGeom>
+          <a:solidFill>
+            <a:srgbClr val="E0F2FE"/>
+          </a:solidFill>
+          <a:ln w="12700">
+            <a:solidFill>
+              <a:srgbClr val="0369A1"/>
+            </a:solidFill>
+            <a:prstDash val="solid"/>
+          </a:ln>
+        </p:spPr>
+      </p:sp>
+      <p:sp>
+        <p:nvSpPr>
+          <p:cNvPr id="15" name="Shape 13"/>
+          <p:cNvSpPr/>
+          <p:nvPr/>
+        </p:nvSpPr>
+        <p:spPr>
+          <a:xfrm>
+            <a:off x="7723327" y="91440"/>
+            <a:ext cx="73152" cy="274320"/>
+          </a:xfrm>
+          <a:prstGeom prst="rect">
+            <a:avLst/>
+          </a:prstGeom>
+          <a:solidFill>
+            <a:srgbClr val="0369A1"/>
+          </a:solidFill>
+          <a:ln w="12700">
+            <a:solidFill>
+              <a:srgbClr val="0369A1"/>
+            </a:solidFill>
+            <a:prstDash val="solid"/>
+          </a:ln>
+        </p:spPr>
+      </p:sp>
+      <p:pic>
+        <p:nvPicPr>
+          <p:cNvPr id="16" name="Image 0" descr="preencoded.png">    </p:cNvPr>
+          <p:cNvPicPr>
+            <a:picLocks noChangeAspect="1"/>
+          </p:cNvPicPr>
+          <p:nvPr/>
+        </p:nvPicPr>
+        <p:blipFill>
+          <a:blip r:embed="rId1"/>
+          <a:stretch>
+            <a:fillRect/>
+          </a:stretch>
+        </p:blipFill>
+        <p:spPr>
+          <a:xfrm>
+            <a:off x="7851343" y="128016"/>
+            <a:ext cx="201168" cy="201168"/>
+          </a:xfrm>
+          <a:prstGeom prst="rect">
+            <a:avLst/>
+          </a:prstGeom>
+        </p:spPr>
+      </p:pic>
+      <p:sp>
+        <p:nvSpPr>
+          <p:cNvPr id="17" name="Text 14"/>
+          <p:cNvSpPr txBox="1"/>
+          <p:nvPr/>
+        </p:nvSpPr>
+        <p:spPr>
+          <a:xfrm>
+            <a:off x="8107375" y="91440"/>
+            <a:ext cx="3499104" cy="274320"/>
+          </a:xfrm>
+          <a:prstGeom prst="rect">
+            <a:avLst/>
+          </a:prstGeom>
+          <a:noFill/>
+          <a:ln/>
+        </p:spPr>
+        <p:txBody>
+          <a:bodyPr wrap="square" lIns="0" tIns="0" rIns="0" bIns="0" rtlCol="0" anchor="ctr"/>
+          <a:lstStyle/>
+          <a:p>
+            <a:pPr indent="0" marL="0">
+              <a:buNone/>
+            </a:pPr>
+            <a:r>
+              <a:rPr lang="en-US" sz="1100" b="1" dirty="0">
+                <a:solidFill>
+                  <a:srgbClr val="075985"/>
+                </a:solidFill>
+                <a:latin typeface="Calibri" pitchFamily="34" charset="0"/>
+                <a:ea typeface="Calibri" pitchFamily="34" charset="-122"/>
+                <a:cs typeface="Calibri" pitchFamily="34" charset="-120"/>
+              </a:rPr>
+              <a:t>DA COMPRENDERE OGGI</a:t>
+            </a:r>
+            <a:pPr indent="0" marL="0">
+              <a:buNone/>
+            </a:pPr>
+            <a:r>
+              <a:rPr lang="en-US" sz="1100" dirty="0">
+                <a:solidFill>
+                  <a:srgbClr val="075985"/>
+                </a:solidFill>
+                <a:latin typeface="Calibri" pitchFamily="34" charset="0"/>
+                <a:ea typeface="Calibri" pitchFamily="34" charset="-122"/>
+                <a:cs typeface="Calibri" pitchFamily="34" charset="-120"/>
+              </a:rPr>
+              <a:t> · macchine a stati finiti</a:t>
+            </a:r>
+            <a:endParaRPr lang="en-US" sz="1100" dirty="0"/>
+          </a:p>
+        </p:txBody>
+      </p:sp>
+      <p:sp>
+        <p:nvSpPr>
           <p:cNvPr id="25" name="Slide Number Placeholder 0"/>
           <p:cNvSpPr>
             <a:spLocks noGrp="1"/>
@@ -33052,6 +36656,299 @@
       </p:sp>
       <p:sp>
         <p:nvSpPr>
+          <p:cNvPr id="17" name="Shape 15"/>
+          <p:cNvSpPr/>
+          <p:nvPr/>
+        </p:nvSpPr>
+        <p:spPr>
+          <a:xfrm>
+            <a:off x="6650431" y="91440"/>
+            <a:ext cx="4992624" cy="274320"/>
+          </a:xfrm>
+          <a:prstGeom prst="rect">
+            <a:avLst/>
+          </a:prstGeom>
+          <a:solidFill>
+            <a:srgbClr val="FEF3C7"/>
+          </a:solidFill>
+          <a:ln w="12700">
+            <a:solidFill>
+              <a:srgbClr val="B45309"/>
+            </a:solidFill>
+            <a:prstDash val="solid"/>
+          </a:ln>
+        </p:spPr>
+      </p:sp>
+      <p:sp>
+        <p:nvSpPr>
+          <p:cNvPr id="18" name="Shape 16"/>
+          <p:cNvSpPr/>
+          <p:nvPr/>
+        </p:nvSpPr>
+        <p:spPr>
+          <a:xfrm>
+            <a:off x="6650431" y="91440"/>
+            <a:ext cx="27432" cy="274320"/>
+          </a:xfrm>
+          <a:prstGeom prst="rect">
+            <a:avLst/>
+          </a:prstGeom>
+          <a:solidFill>
+            <a:srgbClr val="B45309"/>
+          </a:solidFill>
+          <a:ln w="12700">
+            <a:solidFill>
+              <a:srgbClr val="B45309"/>
+            </a:solidFill>
+            <a:prstDash val="solid"/>
+          </a:ln>
+        </p:spPr>
+      </p:sp>
+      <p:sp>
+        <p:nvSpPr>
+          <p:cNvPr id="19" name="Shape 17"/>
+          <p:cNvSpPr/>
+          <p:nvPr/>
+        </p:nvSpPr>
+        <p:spPr>
+          <a:xfrm>
+            <a:off x="6705295" y="91440"/>
+            <a:ext cx="27432" cy="274320"/>
+          </a:xfrm>
+          <a:prstGeom prst="rect">
+            <a:avLst/>
+          </a:prstGeom>
+          <a:solidFill>
+            <a:srgbClr val="B45309"/>
+          </a:solidFill>
+          <a:ln w="12700">
+            <a:solidFill>
+              <a:srgbClr val="B45309"/>
+            </a:solidFill>
+            <a:prstDash val="solid"/>
+          </a:ln>
+        </p:spPr>
+      </p:sp>
+      <p:pic>
+        <p:nvPicPr>
+          <p:cNvPr id="20" name="Image 0" descr="preencoded.png">    </p:cNvPr>
+          <p:cNvPicPr>
+            <a:picLocks noChangeAspect="1"/>
+          </p:cNvPicPr>
+          <p:nvPr/>
+        </p:nvPicPr>
+        <p:blipFill>
+          <a:blip r:embed="rId1"/>
+          <a:stretch>
+            <a:fillRect/>
+          </a:stretch>
+        </p:blipFill>
+        <p:spPr>
+          <a:xfrm>
+            <a:off x="6778447" y="128016"/>
+            <a:ext cx="201168" cy="201168"/>
+          </a:xfrm>
+          <a:prstGeom prst="rect">
+            <a:avLst/>
+          </a:prstGeom>
+        </p:spPr>
+      </p:pic>
+      <p:sp>
+        <p:nvSpPr>
+          <p:cNvPr id="21" name="Text 18"/>
+          <p:cNvSpPr txBox="1"/>
+          <p:nvPr/>
+        </p:nvSpPr>
+        <p:spPr>
+          <a:xfrm>
+            <a:off x="7034479" y="91440"/>
+            <a:ext cx="4572000" cy="274320"/>
+          </a:xfrm>
+          <a:prstGeom prst="rect">
+            <a:avLst/>
+          </a:prstGeom>
+          <a:noFill/>
+          <a:ln/>
+        </p:spPr>
+        <p:txBody>
+          <a:bodyPr wrap="square" lIns="0" tIns="0" rIns="0" bIns="0" rtlCol="0" anchor="ctr"/>
+          <a:lstStyle/>
+          <a:p>
+            <a:pPr indent="0" marL="0">
+              <a:buNone/>
+            </a:pPr>
+            <a:r>
+              <a:rPr lang="en-US" sz="1100" b="1" dirty="0">
+                <a:solidFill>
+                  <a:srgbClr val="92400E"/>
+                </a:solidFill>
+                <a:latin typeface="Calibri" pitchFamily="34" charset="0"/>
+                <a:ea typeface="Calibri" pitchFamily="34" charset="-122"/>
+                <a:cs typeface="Calibri" pitchFamily="34" charset="-120"/>
+              </a:rPr>
+              <a:t>DA UTILIZZARE OGGI</a:t>
+            </a:r>
+            <a:pPr indent="0" marL="0">
+              <a:buNone/>
+            </a:pPr>
+            <a:r>
+              <a:rPr lang="en-US" sz="1100" dirty="0">
+                <a:solidFill>
+                  <a:srgbClr val="92400E"/>
+                </a:solidFill>
+                <a:latin typeface="Calibri" pitchFamily="34" charset="0"/>
+                <a:ea typeface="Calibri" pitchFamily="34" charset="-122"/>
+                <a:cs typeface="Calibri" pitchFamily="34" charset="-120"/>
+              </a:rPr>
+              <a:t> · la convenzione di chiamata</a:t>
+            </a:r>
+            <a:pPr indent="0" marL="0">
+              <a:buNone/>
+            </a:pPr>
+            <a:r>
+              <a:rPr lang="en-US" sz="1100" b="1" dirty="0">
+                <a:solidFill>
+                  <a:srgbClr val="92400E"/>
+                </a:solidFill>
+                <a:latin typeface="Calibri" pitchFamily="34" charset="0"/>
+                <a:ea typeface="Calibri" pitchFamily="34" charset="-122"/>
+                <a:cs typeface="Calibri" pitchFamily="34" charset="-120"/>
+              </a:rPr>
+              <a:t> → Lezione 18</a:t>
+            </a:r>
+            <a:endParaRPr lang="en-US" sz="1100" dirty="0"/>
+          </a:p>
+        </p:txBody>
+      </p:sp>
+      <p:sp>
+        <p:nvSpPr>
+          <p:cNvPr id="22" name="Shape 19"/>
+          <p:cNvSpPr/>
+          <p:nvPr/>
+        </p:nvSpPr>
+        <p:spPr>
+          <a:xfrm>
+            <a:off x="3014929" y="91440"/>
+            <a:ext cx="3525774" cy="274320"/>
+          </a:xfrm>
+          <a:prstGeom prst="rect">
+            <a:avLst/>
+          </a:prstGeom>
+          <a:solidFill>
+            <a:srgbClr val="E0F2FE"/>
+          </a:solidFill>
+          <a:ln w="12700">
+            <a:solidFill>
+              <a:srgbClr val="0369A1"/>
+            </a:solidFill>
+            <a:prstDash val="solid"/>
+          </a:ln>
+        </p:spPr>
+      </p:sp>
+      <p:sp>
+        <p:nvSpPr>
+          <p:cNvPr id="23" name="Shape 20"/>
+          <p:cNvSpPr/>
+          <p:nvPr/>
+        </p:nvSpPr>
+        <p:spPr>
+          <a:xfrm>
+            <a:off x="3014929" y="91440"/>
+            <a:ext cx="73152" cy="274320"/>
+          </a:xfrm>
+          <a:prstGeom prst="rect">
+            <a:avLst/>
+          </a:prstGeom>
+          <a:solidFill>
+            <a:srgbClr val="0369A1"/>
+          </a:solidFill>
+          <a:ln w="12700">
+            <a:solidFill>
+              <a:srgbClr val="0369A1"/>
+            </a:solidFill>
+            <a:prstDash val="solid"/>
+          </a:ln>
+        </p:spPr>
+      </p:sp>
+      <p:pic>
+        <p:nvPicPr>
+          <p:cNvPr id="24" name="Image 1" descr="preencoded.png">    </p:cNvPr>
+          <p:cNvPicPr>
+            <a:picLocks noChangeAspect="1"/>
+          </p:cNvPicPr>
+          <p:nvPr/>
+        </p:nvPicPr>
+        <p:blipFill>
+          <a:blip r:embed="rId2"/>
+          <a:stretch>
+            <a:fillRect/>
+          </a:stretch>
+        </p:blipFill>
+        <p:spPr>
+          <a:xfrm>
+            <a:off x="3142945" y="128016"/>
+            <a:ext cx="201168" cy="201168"/>
+          </a:xfrm>
+          <a:prstGeom prst="rect">
+            <a:avLst/>
+          </a:prstGeom>
+        </p:spPr>
+      </p:pic>
+      <p:sp>
+        <p:nvSpPr>
+          <p:cNvPr id="25" name="Text 21"/>
+          <p:cNvSpPr txBox="1"/>
+          <p:nvPr/>
+        </p:nvSpPr>
+        <p:spPr>
+          <a:xfrm>
+            <a:off x="3398977" y="91440"/>
+            <a:ext cx="3105150" cy="274320"/>
+          </a:xfrm>
+          <a:prstGeom prst="rect">
+            <a:avLst/>
+          </a:prstGeom>
+          <a:noFill/>
+          <a:ln/>
+        </p:spPr>
+        <p:txBody>
+          <a:bodyPr wrap="square" lIns="0" tIns="0" rIns="0" bIns="0" rtlCol="0" anchor="ctr"/>
+          <a:lstStyle/>
+          <a:p>
+            <a:pPr indent="0" marL="0">
+              <a:buNone/>
+            </a:pPr>
+            <a:r>
+              <a:rPr lang="en-US" sz="1100" b="1" dirty="0">
+                <a:solidFill>
+                  <a:srgbClr val="075985"/>
+                </a:solidFill>
+                <a:latin typeface="Calibri" pitchFamily="34" charset="0"/>
+                <a:ea typeface="Calibri" pitchFamily="34" charset="-122"/>
+                <a:cs typeface="Calibri" pitchFamily="34" charset="-120"/>
+              </a:rPr>
+              <a:t>DA COMPRENDERE OGGI</a:t>
+            </a:r>
+            <a:pPr indent="0" marL="0">
+              <a:buNone/>
+            </a:pPr>
+            <a:r>
+              <a:rPr lang="en-US" sz="1100" dirty="0">
+                <a:solidFill>
+                  <a:srgbClr val="075985"/>
+                </a:solidFill>
+                <a:latin typeface="Calibri" pitchFamily="34" charset="0"/>
+                <a:ea typeface="Calibri" pitchFamily="34" charset="-122"/>
+                <a:cs typeface="Calibri" pitchFamily="34" charset="-120"/>
+              </a:rPr>
+              <a:t> · latch e flip-flop</a:t>
+            </a:r>
+            <a:endParaRPr lang="en-US" sz="1100" dirty="0"/>
+          </a:p>
+        </p:txBody>
+      </p:sp>
+      <p:sp>
+        <p:nvSpPr>
           <p:cNvPr id="25" name="Slide Number Placeholder 0"/>
           <p:cNvSpPr>
             <a:spLocks noGrp="1"/>
@@ -34092,6 +37989,133 @@
               <a:t>Etichette con un nome: u_play, u_start, u_done</a:t>
             </a:r>
             <a:endParaRPr lang="en-US" sz="1200" dirty="0"/>
+          </a:p>
+        </p:txBody>
+      </p:sp>
+      <p:sp>
+        <p:nvSpPr>
+          <p:cNvPr id="17" name="Shape 15"/>
+          <p:cNvSpPr/>
+          <p:nvPr/>
+        </p:nvSpPr>
+        <p:spPr>
+          <a:xfrm>
+            <a:off x="7723327" y="91440"/>
+            <a:ext cx="3919728" cy="274320"/>
+          </a:xfrm>
+          <a:prstGeom prst="rect">
+            <a:avLst/>
+          </a:prstGeom>
+          <a:solidFill>
+            <a:srgbClr val="E0F2FE"/>
+          </a:solidFill>
+          <a:ln w="12700">
+            <a:solidFill>
+              <a:srgbClr val="0369A1"/>
+            </a:solidFill>
+            <a:prstDash val="solid"/>
+          </a:ln>
+        </p:spPr>
+      </p:sp>
+      <p:sp>
+        <p:nvSpPr>
+          <p:cNvPr id="18" name="Shape 16"/>
+          <p:cNvSpPr/>
+          <p:nvPr/>
+        </p:nvSpPr>
+        <p:spPr>
+          <a:xfrm>
+            <a:off x="7723327" y="91440"/>
+            <a:ext cx="73152" cy="274320"/>
+          </a:xfrm>
+          <a:prstGeom prst="rect">
+            <a:avLst/>
+          </a:prstGeom>
+          <a:solidFill>
+            <a:srgbClr val="0369A1"/>
+          </a:solidFill>
+          <a:ln w="12700">
+            <a:solidFill>
+              <a:srgbClr val="0369A1"/>
+            </a:solidFill>
+            <a:prstDash val="solid"/>
+          </a:ln>
+        </p:spPr>
+      </p:sp>
+      <p:pic>
+        <p:nvPicPr>
+          <p:cNvPr id="19" name="Image 0" descr="preencoded.png">    </p:cNvPr>
+          <p:cNvPicPr>
+            <a:picLocks noChangeAspect="1"/>
+          </p:cNvPicPr>
+          <p:nvPr/>
+        </p:nvPicPr>
+        <p:blipFill>
+          <a:blip r:embed="rId1"/>
+          <a:stretch>
+            <a:fillRect/>
+          </a:stretch>
+        </p:blipFill>
+        <p:spPr>
+          <a:xfrm>
+            <a:off x="7851343" y="128016"/>
+            <a:ext cx="201168" cy="201168"/>
+          </a:xfrm>
+          <a:prstGeom prst="rect">
+            <a:avLst/>
+          </a:prstGeom>
+        </p:spPr>
+      </p:pic>
+      <p:sp>
+        <p:nvSpPr>
+          <p:cNvPr id="20" name="Text 17"/>
+          <p:cNvSpPr txBox="1"/>
+          <p:nvPr/>
+        </p:nvSpPr>
+        <p:spPr>
+          <a:xfrm>
+            <a:off x="8107375" y="91440"/>
+            <a:ext cx="3499104" cy="274320"/>
+          </a:xfrm>
+          <a:prstGeom prst="rect">
+            <a:avLst/>
+          </a:prstGeom>
+          <a:noFill/>
+          <a:ln/>
+        </p:spPr>
+        <p:txBody>
+          <a:bodyPr wrap="square" lIns="0" tIns="0" rIns="0" bIns="0" rtlCol="0" anchor="ctr"/>
+          <a:lstStyle/>
+          <a:p>
+            <a:pPr indent="0" marL="0">
+              <a:buNone/>
+            </a:pPr>
+            <a:r>
+              <a:rPr lang="en-US" sz="1100" b="1" dirty="0">
+                <a:solidFill>
+                  <a:srgbClr val="075985"/>
+                </a:solidFill>
+                <a:latin typeface="Calibri" pitchFamily="34" charset="0"/>
+                <a:ea typeface="Calibri" pitchFamily="34" charset="-122"/>
+                <a:cs typeface="Calibri" pitchFamily="34" charset="-120"/>
+              </a:rPr>
+              <a:t>DA COMPRENDERE OGGI</a:t>
+            </a:r>
+            <a:pPr indent="0" marL="0">
+              <a:buNone/>
+            </a:pPr>
+            <a:r>
+              <a:rPr lang="en-US" sz="1100" dirty="0">
+                <a:solidFill>
+                  <a:srgbClr val="075985"/>
+                </a:solidFill>
+                <a:latin typeface="Calibri" pitchFamily="34" charset="0"/>
+                <a:ea typeface="Calibri" pitchFamily="34" charset="-122"/>
+                <a:cs typeface="Calibri" pitchFamily="34" charset="-120"/>
+              </a:rPr>
+              <a:t> · macchine a stati finiti</a:t>
+            </a:r>
+            <a:endParaRPr lang="en-US" sz="1100" dirty="0"/>
           </a:p>
         </p:txBody>
       </p:sp>

--- a/it/slides/17-Architettura_dei_Calcolatori-Verm1_Parte_3-Codice.pptx
+++ b/it/slides/17-Architettura_dei_Calcolatori-Verm1_Parte_3-Codice.pptx
@@ -143,25 +143,25 @@
   <p:extLst>
     <p:ext uri="{521415D9-36F7-43E2-AB2F-B90AF26B5E84}">
       <p14:sectionLst xmlns:p14="http://schemas.microsoft.com/office/powerpoint/2010/main">
-        <p14:section name="Apertura" id="{1dccb343-d94f-90e8-6d2e-5f2268664b7e}">
+        <p14:section name="Apertura" id="{58c4ef00-1b9f-1efa-b5dc-6b5fd637aac7}">
           <p14:sldIdLst>
             <p14:sldId id="256"/>
             <p14:sldId id="257"/>
           </p14:sldIdLst>
         </p14:section>
-        <p14:section name="I listati" id="{1cd903a2-7722-3394-c3ef-c78d8cd5e835}">
+        <p14:section name="I listati" id="{9c6c649f-38ed-9155-47f2-b5da8d2a5198}">
           <p14:sldIdLst>
             <p14:sldId id="258"/>
           </p14:sldIdLst>
         </p14:section>
-        <p14:section name="Passo 1: la memoria del gioco" id="{3c345c91-c2f8-0841-eaac-958e00e3b618}">
+        <p14:section name="Passo 1: la memoria del gioco" id="{c83daf02-20c1-d7e7-bf4c-4973024ee111}">
           <p14:sldIdLst>
             <p14:sldId id="259"/>
             <p14:sldId id="260"/>
             <p14:sldId id="261"/>
           </p14:sldIdLst>
         </p14:section>
-        <p14:section name="Passo 2: tre stati" id="{61147961-89b6-9948-06dc-4b8cf7719ace}">
+        <p14:section name="Passo 2: tre stati" id="{a67b0ecd-042e-6f0a-48c2-11f8896e3748}">
           <p14:sldIdLst>
             <p14:sldId id="262"/>
             <p14:sldId id="263"/>
@@ -172,7 +172,7 @@
             <p14:sldId id="268"/>
           </p14:sldIdLst>
         </p14:section>
-        <p14:section name="Passo 3: un verme in memoria" id="{34f3c044-ca4e-aa72-148e-85810c57df38}">
+        <p14:section name="Passo 3: un verme in memoria" id="{e69e7b0e-76e9-b13e-6864-4246b7197d7b}">
           <p14:sldIdLst>
             <p14:sldId id="269"/>
             <p14:sldId id="270"/>
@@ -182,7 +182,7 @@
             <p14:sldId id="274"/>
           </p14:sldIdLst>
         </p14:section>
-        <p14:section name="Passo 4: le regole" id="{2218eab7-2c6c-8470-a4a5-16318cc65a04}">
+        <p14:section name="Passo 4: le regole" id="{2fa641c7-ef99-dcdd-2d56-002fc020b2c7}">
           <p14:sldIdLst>
             <p14:sldId id="275"/>
             <p14:sldId id="276"/>
@@ -195,14 +195,14 @@
             <p14:sldId id="283"/>
           </p14:sldIdLst>
         </p14:section>
-        <p14:section name="Passo 5: guardare la memoria muoversi" id="{0d35dba8-fb10-49b2-dd29-b3b3a564a41d}">
+        <p14:section name="Passo 5: guardare la memoria muoversi" id="{834e5154-d6fe-89f1-6f57-ea23bff747ea}">
           <p14:sldIdLst>
             <p14:sldId id="284"/>
             <p14:sldId id="285"/>
             <p14:sldId id="286"/>
           </p14:sldIdLst>
         </p14:section>
-        <p14:section name="Eseguire e provare" id="{1f1d1c5e-7ea6-7cbd-06a6-b78ae4bc22dd}">
+        <p14:section name="Eseguire e provare" id="{cb432f73-9578-a4e0-d3a3-8adb7fb259dd}">
           <p14:sldIdLst>
             <p14:sldId id="287"/>
             <p14:sldId id="288"/>
@@ -211,7 +211,7 @@
             <p14:sldId id="291"/>
           </p14:sldIdLst>
         </p14:section>
-        <p14:section name="Esercizi" id="{39ccc54a-a09a-d26d-f995-88a727bd62d8}">
+        <p14:section name="Esercizi" id="{a304b498-b2aa-8be5-eded-51c3e199957e}">
           <p14:sldIdLst>
             <p14:sldId id="292"/>
           </p14:sldIdLst>
